--- a/presentations/AL_L05_PseudocodePress_Lesson.pptx
+++ b/presentations/AL_L05_PseudocodePress_Lesson.pptx
@@ -516,7 +516,7 @@
             <a:r>
               <a:rPr lang="en-US" dirty="0"/>
               <a:t>Lesson 5: Pseudocode press.
-Open the experience at revise360.co.uk and hand out AL_L05_Pseudocodepress_Worksheet.docx.</a:t>
+Open the experience at revise360.co.uk and hand out AL_L05_PseudocodePress_Worksheet.docx.</a:t>
             </a:r>
             <a:endParaRPr lang="en-US" dirty="0"/>
           </a:p>

--- a/presentations/AL_L05_PseudocodePress_Lesson.pptx
+++ b/presentations/AL_L05_PseudocodePress_Lesson.pptx
@@ -19,9 +19,11 @@
     <p:sldId id="267" r:id="rId13"/>
     <p:sldId id="268" r:id="rId14"/>
     <p:sldId id="269" r:id="rId15"/>
+    <p:sldId id="270" r:id="rId16"/>
+    <p:sldId id="271" r:id="rId17"/>
   </p:sldIdLst>
   <p:notesMasterIdLst>
-    <p:notesMasterId r:id="rId16"/>
+    <p:notesMasterId r:id="rId18"/>
   </p:notesMasterIdLst>
   <p:sldSz cx="12192000" cy="6858000"/>
   <p:notesSz cx="6858000" cy="12192000"/>
@@ -692,7 +694,10 @@
           <a:p>
             <a:r>
               <a:rPr lang="en-US" dirty="0"/>
-              <a:t>Make them commit to an answer on paper before they tap the star. Guessing first costs them the learning.</a:t>
+              <a:t>Build this at the front, line by line, saying the decisions rather than reading the code. Stop before the finished panel and ask the class where the counter should go; the wrong answer - inside the loop - is the one that costs marks in the exam, and it is worth hearing it said out loud before you correct it.
+The scenario is deliberately not one the pupils are about to write. The station challenges are a greeting, a pass or fail, the numbers one to five and the third item of an array; the exam practice is ten numbers and the largest. Counting ages over a threshold is none of them.
+If the class is secure, ask what changes if the club has an unknown number of members. The answer is a while loop with a sentinel, which is where this goes next.
+Say this out loud: Say the three lines that are not obvious out loud: why the counter is set before the loop, why 0 to 7 is eight, and why the output is outside.</a:t>
             </a:r>
             <a:endParaRPr lang="en-US" dirty="0"/>
           </a:p>
@@ -780,7 +785,13 @@
           <a:p>
             <a:r>
               <a:rPr lang="en-US" dirty="0"/>
-              <a:t>Use these as a settler, or as something for early finishers to read in the experience.</a:t>
+              <a:t>The answer is D: Five.
+Do not say it yet. Every pupil commits first - fingers, whiteboards or a show of hands on each letter in turn - and you count the split before anyone can change their mind.
+IF MOST OF THE CLASS IS RIGHT: say why it is right in one sentence and go straight on to the independent work.
+IF A SIGNIFICANT GROUP IS ON ONE WRONG LETTER: that option is the misconception to teach against before anyone goes on. Go back to station 4, Iteration, and work through its example again, aloud, with the class watching, then re-ask this question.
+The course's own response to a wrong answer here: Both ends are included in the reference language.
+A limitation, stated rather than papered over: one response covers every wrong option; it does not say what to revisit for each one. The course does not record what each separate wrong option means, and this slide does not invent it. Decide your own reteach for each option before the lesson; the options above are the start of it.
+This is a real activity from the experience (al-l05-s4-c2), so the wording here is the wording a pupil will see.</a:t>
             </a:r>
             <a:endParaRPr lang="en-US" dirty="0"/>
           </a:p>
@@ -868,7 +879,7 @@
           <a:p>
             <a:r>
               <a:rPr lang="en-US" dirty="0"/>
-              <a:t>Timed and silent. Mark against the answer sheet, then ask students to record their weakest area.</a:t>
+              <a:t>Make them commit to an answer on paper before they tap the star. Guessing first costs them the learning.</a:t>
             </a:r>
             <a:endParaRPr lang="en-US" dirty="0"/>
           </a:p>
@@ -956,7 +967,7 @@
           <a:p>
             <a:r>
               <a:rPr lang="en-US" dirty="0"/>
-              <a:t>Students copy their score-screen breakdown onto the worksheet, then rate themselves here.</a:t>
+              <a:t>Use these as a settler, or as something for early finishers to read in the experience.</a:t>
             </a:r>
             <a:endParaRPr lang="en-US" dirty="0"/>
           </a:p>
@@ -980,6 +991,182 @@
             <a:fld id="{F7021451-1387-4CA6-816F-3879F97B5CBC}" type="slidenum">
               <a:rPr lang="en-US"/>
               <a:t>14</a:t>
+            </a:fld>
+            <a:endParaRPr lang="en-US"/>
+          </a:p>
+        </p:txBody>
+      </p:sp>
+    </p:spTree>
+    <p:extLst>
+      <p:ext uri="{BB962C8B-B14F-4D97-AF65-F5344CB8AC3E}">
+        <p14:creationId xmlns:p14="http://schemas.microsoft.com/office/powerpoint/2010/main" val="1024086991"/>
+      </p:ext>
+    </p:extLst>
+  </p:cSld>
+  <p:clrMapOvr>
+    <a:masterClrMapping/>
+  </p:clrMapOvr>
+</p:notes>
+</file>
+
+<file path=ppt/notesSlides/notesSlide15.xml><?xml version="1.0" encoding="utf-8"?>
+<p:notes xmlns:a="http://schemas.openxmlformats.org/drawingml/2006/main" xmlns:r="http://schemas.openxmlformats.org/officeDocument/2006/relationships" xmlns:p="http://schemas.openxmlformats.org/presentationml/2006/main">
+  <p:cSld>
+    <p:spTree>
+      <p:nvGrpSpPr>
+        <p:cNvPr id="1" name=""/>
+        <p:cNvGrpSpPr/>
+        <p:nvPr/>
+      </p:nvGrpSpPr>
+      <p:grpSpPr>
+        <a:xfrm>
+          <a:off x="0" y="0"/>
+          <a:ext cx="0" cy="0"/>
+          <a:chOff x="0" y="0"/>
+          <a:chExt cx="0" cy="0"/>
+        </a:xfrm>
+      </p:grpSpPr>
+      <p:sp>
+        <p:nvSpPr>
+          <p:cNvPr id="2" name="Slide Image Placeholder 1"/>
+          <p:cNvSpPr>
+            <a:spLocks noGrp="1" noRot="1" noChangeAspect="1"/>
+          </p:cNvSpPr>
+          <p:nvPr>
+            <p:ph type="sldImg"/>
+          </p:nvPr>
+        </p:nvSpPr>
+        <p:spPr/>
+      </p:sp>
+      <p:sp>
+        <p:nvSpPr>
+          <p:cNvPr id="3" name="Notes Placeholder 2"/>
+          <p:cNvSpPr>
+            <a:spLocks noGrp="1"/>
+          </p:cNvSpPr>
+          <p:nvPr>
+            <p:ph type="body" idx="1"/>
+          </p:nvPr>
+        </p:nvSpPr>
+        <p:spPr/>
+        <p:txBody>
+          <a:bodyPr/>
+          <a:lstStyle/>
+          <a:p>
+            <a:r>
+              <a:rPr lang="en-US" dirty="0"/>
+              <a:t>Timed and silent. Mark against the answer sheet, then ask students to record their weakest area.</a:t>
+            </a:r>
+            <a:endParaRPr lang="en-US" dirty="0"/>
+          </a:p>
+        </p:txBody>
+      </p:sp>
+      <p:sp>
+        <p:nvSpPr>
+          <p:cNvPr id="4" name="Slide Number Placeholder 3"/>
+          <p:cNvSpPr>
+            <a:spLocks noGrp="1"/>
+          </p:cNvSpPr>
+          <p:nvPr>
+            <p:ph type="sldNum" sz="quarter" idx="10"/>
+          </p:nvPr>
+        </p:nvSpPr>
+        <p:spPr/>
+        <p:txBody>
+          <a:bodyPr/>
+          <a:lstStyle/>
+          <a:p>
+            <a:fld id="{F7021451-1387-4CA6-816F-3879F97B5CBC}" type="slidenum">
+              <a:rPr lang="en-US"/>
+              <a:t>15</a:t>
+            </a:fld>
+            <a:endParaRPr lang="en-US"/>
+          </a:p>
+        </p:txBody>
+      </p:sp>
+    </p:spTree>
+    <p:extLst>
+      <p:ext uri="{BB962C8B-B14F-4D97-AF65-F5344CB8AC3E}">
+        <p14:creationId xmlns:p14="http://schemas.microsoft.com/office/powerpoint/2010/main" val="1024086991"/>
+      </p:ext>
+    </p:extLst>
+  </p:cSld>
+  <p:clrMapOvr>
+    <a:masterClrMapping/>
+  </p:clrMapOvr>
+</p:notes>
+</file>
+
+<file path=ppt/notesSlides/notesSlide16.xml><?xml version="1.0" encoding="utf-8"?>
+<p:notes xmlns:a="http://schemas.openxmlformats.org/drawingml/2006/main" xmlns:r="http://schemas.openxmlformats.org/officeDocument/2006/relationships" xmlns:p="http://schemas.openxmlformats.org/presentationml/2006/main">
+  <p:cSld>
+    <p:spTree>
+      <p:nvGrpSpPr>
+        <p:cNvPr id="1" name=""/>
+        <p:cNvGrpSpPr/>
+        <p:nvPr/>
+      </p:nvGrpSpPr>
+      <p:grpSpPr>
+        <a:xfrm>
+          <a:off x="0" y="0"/>
+          <a:ext cx="0" cy="0"/>
+          <a:chOff x="0" y="0"/>
+          <a:chExt cx="0" cy="0"/>
+        </a:xfrm>
+      </p:grpSpPr>
+      <p:sp>
+        <p:nvSpPr>
+          <p:cNvPr id="2" name="Slide Image Placeholder 1"/>
+          <p:cNvSpPr>
+            <a:spLocks noGrp="1" noRot="1" noChangeAspect="1"/>
+          </p:cNvSpPr>
+          <p:nvPr>
+            <p:ph type="sldImg"/>
+          </p:nvPr>
+        </p:nvSpPr>
+        <p:spPr/>
+      </p:sp>
+      <p:sp>
+        <p:nvSpPr>
+          <p:cNvPr id="3" name="Notes Placeholder 2"/>
+          <p:cNvSpPr>
+            <a:spLocks noGrp="1"/>
+          </p:cNvSpPr>
+          <p:nvPr>
+            <p:ph type="body" idx="1"/>
+          </p:nvPr>
+        </p:nvSpPr>
+        <p:spPr/>
+        <p:txBody>
+          <a:bodyPr/>
+          <a:lstStyle/>
+          <a:p>
+            <a:r>
+              <a:rPr lang="en-US" dirty="0"/>
+              <a:t>Students copy their score-screen breakdown onto the worksheet, then rate themselves here.</a:t>
+            </a:r>
+            <a:endParaRPr lang="en-US" dirty="0"/>
+          </a:p>
+        </p:txBody>
+      </p:sp>
+      <p:sp>
+        <p:nvSpPr>
+          <p:cNvPr id="4" name="Slide Number Placeholder 3"/>
+          <p:cNvSpPr>
+            <a:spLocks noGrp="1"/>
+          </p:cNvSpPr>
+          <p:nvPr>
+            <p:ph type="sldNum" sz="quarter" idx="10"/>
+          </p:nvPr>
+        </p:nvSpPr>
+        <p:spPr/>
+        <p:txBody>
+          <a:bodyPr/>
+          <a:lstStyle/>
+          <a:p>
+            <a:fld id="{F7021451-1387-4CA6-816F-3879F97B5CBC}" type="slidenum">
+              <a:rPr lang="en-US"/>
+              <a:t>16</a:t>
             </a:fld>
             <a:endParaRPr lang="en-US"/>
           </a:p>
@@ -2943,75 +3130,14 @@
       </p:sp>
       <p:sp>
         <p:nvSpPr>
-          <p:cNvPr id="5" name="Shape 3"/>
-          <p:cNvSpPr/>
-          <p:nvPr/>
-        </p:nvSpPr>
-        <p:spPr>
-          <a:xfrm>
-            <a:off x="502920" y="438912"/>
-            <a:ext cx="3108960" cy="502920"/>
-          </a:xfrm>
-          <a:prstGeom prst="roundRect">
-            <a:avLst>
-              <a:gd name="adj" fmla="val 18182"/>
-            </a:avLst>
-          </a:prstGeom>
-          <a:solidFill>
-            <a:srgbClr val="F4B942"/>
-          </a:solidFill>
-          <a:ln/>
-        </p:spPr>
-      </p:sp>
-      <p:sp>
-        <p:nvSpPr>
-          <p:cNvPr id="6" name="Text 4"/>
-          <p:cNvSpPr txBox="1"/>
-          <p:nvPr/>
-        </p:nvSpPr>
-        <p:spPr>
-          <a:xfrm>
-            <a:off x="502920" y="438912"/>
-            <a:ext cx="3108960" cy="502920"/>
-          </a:xfrm>
-          <a:prstGeom prst="rect">
-            <a:avLst/>
-          </a:prstGeom>
-          <a:noFill/>
-          <a:ln/>
-        </p:spPr>
-        <p:txBody>
-          <a:bodyPr wrap="square" lIns="0" tIns="0" rIns="0" bIns="0" rtlCol="0" anchor="ctr"/>
-          <a:lstStyle/>
-          <a:p>
-            <a:pPr algn="ctr" indent="0" marL="0">
-              <a:buNone/>
-            </a:pPr>
-            <a:r>
-              <a:rPr lang="en-US" sz="1300" b="1" dirty="0">
-                <a:solidFill>
-                  <a:srgbClr val="101828"/>
-                </a:solidFill>
-                <a:latin typeface="IBM Plex Mono" pitchFamily="34" charset="0"/>
-                <a:ea typeface="IBM Plex Mono" pitchFamily="34" charset="-122"/>
-                <a:cs typeface="IBM Plex Mono" pitchFamily="34" charset="-120"/>
-              </a:rPr>
-              <a:t>★  FINAL CHALLENGE</a:t>
-            </a:r>
-            <a:endParaRPr lang="en-US" sz="1300" dirty="0"/>
-          </a:p>
-        </p:txBody>
-      </p:sp>
-      <p:sp>
-        <p:nvSpPr>
-          <p:cNvPr id="7" name="Text 5"/>
-          <p:cNvSpPr txBox="1"/>
-          <p:nvPr/>
-        </p:nvSpPr>
-        <p:spPr>
-          <a:xfrm>
-            <a:off x="502920" y="1097280"/>
-            <a:ext cx="11155680" cy="731520"/>
+          <p:cNvPr id="5" name="Text 3"/>
+          <p:cNvSpPr txBox="1"/>
+          <p:nvPr/>
+        </p:nvSpPr>
+        <p:spPr>
+          <a:xfrm>
+            <a:off x="502920" y="411480"/>
+            <a:ext cx="11155680" cy="777240"/>
           </a:xfrm>
           <a:prstGeom prst="rect">
             <a:avLst/>
@@ -3027,7 +3153,7 @@
               <a:buNone/>
             </a:pPr>
             <a:r>
-              <a:rPr lang="en-US" sz="3400" b="1" dirty="0">
+              <a:rPr lang="en-US" sz="3200" b="1" dirty="0">
                 <a:solidFill>
                   <a:srgbClr val="101828"/>
                 </a:solidFill>
@@ -3035,26 +3161,65 @@
                 <a:ea typeface="IBM Plex Sans" pitchFamily="34" charset="-122"/>
                 <a:cs typeface="IBM Plex Sans" pitchFamily="34" charset="-120"/>
               </a:rPr>
-              <a:t>Read the code</a:t>
-            </a:r>
-            <a:endParaRPr lang="en-US" sz="3400" dirty="0"/>
-          </a:p>
-        </p:txBody>
-      </p:sp>
-      <p:sp>
-        <p:nvSpPr>
-          <p:cNvPr id="8" name="Shape 6"/>
+              <a:t>Watch me write one</a:t>
+            </a:r>
+            <a:endParaRPr lang="en-US" sz="3200" dirty="0"/>
+          </a:p>
+        </p:txBody>
+      </p:sp>
+      <p:sp>
+        <p:nvSpPr>
+          <p:cNvPr id="6" name="Text 4"/>
+          <p:cNvSpPr txBox="1"/>
+          <p:nvPr/>
+        </p:nvSpPr>
+        <p:spPr>
+          <a:xfrm>
+            <a:off x="502920" y="1170432"/>
+            <a:ext cx="11155680" cy="411480"/>
+          </a:xfrm>
+          <a:prstGeom prst="rect">
+            <a:avLst/>
+          </a:prstGeom>
+          <a:noFill/>
+          <a:ln/>
+        </p:spPr>
+        <p:txBody>
+          <a:bodyPr wrap="square" lIns="0" tIns="0" rIns="0" bIns="0" rtlCol="0" anchor="ctr"/>
+          <a:lstStyle/>
+          <a:p>
+            <a:pPr indent="0" marL="0">
+              <a:buNone/>
+            </a:pPr>
+            <a:r>
+              <a:rPr lang="en-US" sz="1500" dirty="0">
+                <a:solidFill>
+                  <a:srgbClr val="667085"/>
+                </a:solidFill>
+                <a:latin typeface="IBM Plex Sans" pitchFamily="34" charset="0"/>
+                <a:ea typeface="IBM Plex Sans" pitchFamily="34" charset="-122"/>
+                <a:cs typeface="IBM Plex Sans" pitchFamily="34" charset="-120"/>
+              </a:rPr>
+              <a:t>A different problem from yours, so you get the method and not the answer</a:t>
+            </a:r>
+            <a:endParaRPr lang="en-US" sz="1500" dirty="0"/>
+          </a:p>
+        </p:txBody>
+      </p:sp>
+      <p:sp>
+        <p:nvSpPr>
+          <p:cNvPr id="7" name="Shape 5"/>
           <p:cNvSpPr/>
           <p:nvPr/>
         </p:nvSpPr>
         <p:spPr>
           <a:xfrm>
-            <a:off x="502920" y="2011680"/>
-            <a:ext cx="11155680" cy="2194560"/>
+            <a:off x="502920" y="1719072"/>
+            <a:ext cx="3566160" cy="2016811"/>
           </a:xfrm>
           <a:prstGeom prst="roundRect">
             <a:avLst>
-              <a:gd name="adj" fmla="val 5000"/>
+              <a:gd name="adj" fmla="val 5441"/>
             </a:avLst>
           </a:prstGeom>
           <a:solidFill>
@@ -3062,7 +3227,7 @@
           </a:solidFill>
           <a:ln w="15875">
             <a:solidFill>
-              <a:srgbClr val="2D63FF"/>
+              <a:srgbClr val="D9DEE7"/>
             </a:solidFill>
             <a:prstDash val="solid"/>
           </a:ln>
@@ -3070,33 +3235,72 @@
       </p:sp>
       <p:sp>
         <p:nvSpPr>
+          <p:cNvPr id="8" name="Text 6"/>
+          <p:cNvSpPr txBox="1"/>
+          <p:nvPr/>
+        </p:nvSpPr>
+        <p:spPr>
+          <a:xfrm>
+            <a:off x="777240" y="1883664"/>
+            <a:ext cx="3017520" cy="292608"/>
+          </a:xfrm>
+          <a:prstGeom prst="rect">
+            <a:avLst/>
+          </a:prstGeom>
+          <a:noFill/>
+          <a:ln/>
+        </p:spPr>
+        <p:txBody>
+          <a:bodyPr wrap="square" lIns="0" tIns="0" rIns="0" bIns="0" rtlCol="0" anchor="ctr"/>
+          <a:lstStyle/>
+          <a:p>
+            <a:pPr indent="0" marL="0">
+              <a:buNone/>
+            </a:pPr>
+            <a:r>
+              <a:rPr lang="en-US" sz="1100" b="1" dirty="0">
+                <a:solidFill>
+                  <a:srgbClr val="667085"/>
+                </a:solidFill>
+                <a:latin typeface="IBM Plex Mono" pitchFamily="34" charset="0"/>
+                <a:ea typeface="IBM Plex Mono" pitchFamily="34" charset="-122"/>
+                <a:cs typeface="IBM Plex Mono" pitchFamily="34" charset="-120"/>
+              </a:rPr>
+              <a:t>THE PROBLEM</a:t>
+            </a:r>
+            <a:endParaRPr lang="en-US" sz="1100" dirty="0"/>
+          </a:p>
+        </p:txBody>
+      </p:sp>
+      <p:sp>
+        <p:nvSpPr>
           <p:cNvPr id="9" name="Text 7"/>
           <p:cNvSpPr txBox="1"/>
           <p:nvPr/>
         </p:nvSpPr>
         <p:spPr>
           <a:xfrm>
-            <a:off x="1005840" y="2331720"/>
-            <a:ext cx="10149840" cy="1554480"/>
-          </a:xfrm>
-          <a:prstGeom prst="rect">
-            <a:avLst/>
-          </a:prstGeom>
-          <a:noFill/>
-          <a:ln/>
-        </p:spPr>
-        <p:txBody>
-          <a:bodyPr wrap="square" lIns="0" tIns="0" rIns="0" bIns="0" rtlCol="0" anchor="ctr"/>
+            <a:off x="777240" y="2231136"/>
+            <a:ext cx="3017520" cy="1358443"/>
+          </a:xfrm>
+          <a:prstGeom prst="rect">
+            <a:avLst/>
+          </a:prstGeom>
+          <a:noFill/>
+          <a:ln/>
+        </p:spPr>
+        <p:txBody>
+          <a:bodyPr wrap="square" lIns="0" tIns="0" rIns="0" bIns="0" rtlCol="0" anchor="t"/>
           <a:lstStyle/>
           <a:p>
             <a:pPr indent="0" marL="0">
               <a:lnSpc>
-                <a:spcPct val="130000"/>
+                <a:spcPct val="118000"/>
               </a:lnSpc>
               <a:buNone/>
             </a:pPr>
             <a:r>
-              <a:rPr lang="en-US" sz="2200" dirty="0">
+              <a:rPr lang="en-US" sz="1100" dirty="0">
                 <a:solidFill>
                   <a:srgbClr val="101828"/>
                 </a:solidFill>
@@ -3104,48 +3308,591 @@
                 <a:ea typeface="IBM Plex Sans" pitchFamily="34" charset="-122"/>
                 <a:cs typeface="IBM Plex Sans" pitchFamily="34" charset="-120"/>
               </a:rPr>
-              <a:t>Three short programs in the reference language. Tap the star and work out what each one does.</a:t>
-            </a:r>
-            <a:endParaRPr lang="en-US" sz="2200" dirty="0"/>
-          </a:p>
-        </p:txBody>
-      </p:sp>
-      <p:sp>
-        <p:nvSpPr>
-          <p:cNvPr id="10" name="Text 8"/>
-          <p:cNvSpPr txBox="1"/>
-          <p:nvPr/>
-        </p:nvSpPr>
-        <p:spPr>
-          <a:xfrm>
-            <a:off x="502920" y="4526280"/>
-            <a:ext cx="11155680" cy="457200"/>
-          </a:xfrm>
-          <a:prstGeom prst="rect">
-            <a:avLst/>
-          </a:prstGeom>
-          <a:noFill/>
-          <a:ln/>
-        </p:spPr>
-        <p:txBody>
-          <a:bodyPr wrap="square" lIns="0" tIns="0" rIns="0" bIns="0" rtlCol="0" anchor="ctr"/>
-          <a:lstStyle/>
+              <a:t>A club records the age of eight members.</a:t>
+            </a:r>
+            <a:endParaRPr lang="en-US" sz="1100" dirty="0"/>
+          </a:p>
           <a:p>
             <a:pPr indent="0" marL="0">
-              <a:buNone/>
-            </a:pPr>
-            <a:r>
-              <a:rPr lang="en-US" sz="1600" dirty="0">
-                <a:solidFill>
-                  <a:srgbClr val="667085"/>
+              <a:lnSpc>
+                <a:spcPct val="118000"/>
+              </a:lnSpc>
+              <a:buNone/>
+            </a:pPr>
+            <a:endParaRPr lang="en-US" sz="1100" dirty="0"/>
+          </a:p>
+          <a:p>
+            <a:pPr indent="0" marL="0">
+              <a:lnSpc>
+                <a:spcPct val="118000"/>
+              </a:lnSpc>
+              <a:buNone/>
+            </a:pPr>
+            <a:r>
+              <a:rPr lang="en-US" sz="1100" dirty="0">
+                <a:solidFill>
+                  <a:srgbClr val="101828"/>
                 </a:solidFill>
                 <a:latin typeface="IBM Plex Sans" pitchFamily="34" charset="0"/>
                 <a:ea typeface="IBM Plex Sans" pitchFamily="34" charset="-122"/>
                 <a:cs typeface="IBM Plex Sans" pitchFamily="34" charset="-120"/>
               </a:rPr>
-              <a:t>Predict on paper first, then look down and test it.</a:t>
-            </a:r>
-            <a:endParaRPr lang="en-US" sz="1600" dirty="0"/>
+              <a:t>Write an algorithm, using pseudocode, that outputs how many of them are 18 or over.  [6]</a:t>
+            </a:r>
+            <a:endParaRPr lang="en-US" sz="1100" dirty="0"/>
+          </a:p>
+        </p:txBody>
+      </p:sp>
+      <p:sp>
+        <p:nvSpPr>
+          <p:cNvPr id="10" name="Shape 8"/>
+          <p:cNvSpPr/>
+          <p:nvPr/>
+        </p:nvSpPr>
+        <p:spPr>
+          <a:xfrm>
+            <a:off x="4297680" y="1719072"/>
+            <a:ext cx="3566160" cy="2016811"/>
+          </a:xfrm>
+          <a:prstGeom prst="roundRect">
+            <a:avLst>
+              <a:gd name="adj" fmla="val 5441"/>
+            </a:avLst>
+          </a:prstGeom>
+          <a:solidFill>
+            <a:srgbClr val="FFFFFF"/>
+          </a:solidFill>
+          <a:ln w="15875">
+            <a:solidFill>
+              <a:srgbClr val="D9DEE7"/>
+            </a:solidFill>
+            <a:prstDash val="solid"/>
+          </a:ln>
+        </p:spPr>
+      </p:sp>
+      <p:sp>
+        <p:nvSpPr>
+          <p:cNvPr id="11" name="Text 9"/>
+          <p:cNvSpPr txBox="1"/>
+          <p:nvPr/>
+        </p:nvSpPr>
+        <p:spPr>
+          <a:xfrm>
+            <a:off x="4572000" y="1883664"/>
+            <a:ext cx="3017520" cy="292608"/>
+          </a:xfrm>
+          <a:prstGeom prst="rect">
+            <a:avLst/>
+          </a:prstGeom>
+          <a:noFill/>
+          <a:ln/>
+        </p:spPr>
+        <p:txBody>
+          <a:bodyPr wrap="square" lIns="0" tIns="0" rIns="0" bIns="0" rtlCol="0" anchor="ctr"/>
+          <a:lstStyle/>
+          <a:p>
+            <a:pPr indent="0" marL="0">
+              <a:buNone/>
+            </a:pPr>
+            <a:r>
+              <a:rPr lang="en-US" sz="1100" b="1" dirty="0">
+                <a:solidFill>
+                  <a:srgbClr val="667085"/>
+                </a:solidFill>
+                <a:latin typeface="IBM Plex Mono" pitchFamily="34" charset="0"/>
+                <a:ea typeface="IBM Plex Mono" pitchFamily="34" charset="-122"/>
+                <a:cs typeface="IBM Plex Mono" pitchFamily="34" charset="-120"/>
+              </a:rPr>
+              <a:t>WHAT I'M THINKING</a:t>
+            </a:r>
+            <a:endParaRPr lang="en-US" sz="1100" dirty="0"/>
+          </a:p>
+        </p:txBody>
+      </p:sp>
+      <p:sp>
+        <p:nvSpPr>
+          <p:cNvPr id="12" name="Text 10"/>
+          <p:cNvSpPr txBox="1"/>
+          <p:nvPr/>
+        </p:nvSpPr>
+        <p:spPr>
+          <a:xfrm>
+            <a:off x="4572000" y="2231136"/>
+            <a:ext cx="3017520" cy="1358443"/>
+          </a:xfrm>
+          <a:prstGeom prst="rect">
+            <a:avLst/>
+          </a:prstGeom>
+          <a:noFill/>
+          <a:ln/>
+        </p:spPr>
+        <p:txBody>
+          <a:bodyPr wrap="square" lIns="0" tIns="0" rIns="0" bIns="0" rtlCol="0" anchor="t"/>
+          <a:lstStyle/>
+          <a:p>
+            <a:pPr indent="0" marL="0">
+              <a:lnSpc>
+                <a:spcPct val="118000"/>
+              </a:lnSpc>
+              <a:buNone/>
+            </a:pPr>
+            <a:r>
+              <a:rPr lang="en-US" sz="1100" dirty="0">
+                <a:solidFill>
+                  <a:srgbClr val="101828"/>
+                </a:solidFill>
+                <a:latin typeface="IBM Plex Sans" pitchFamily="34" charset="0"/>
+                <a:ea typeface="IBM Plex Sans" pitchFamily="34" charset="-122"/>
+                <a:cs typeface="IBM Plex Sans" pitchFamily="34" charset="-120"/>
+              </a:rPr>
+              <a:t>Eight of something means a count-controlled loop.</a:t>
+            </a:r>
+            <a:endParaRPr lang="en-US" sz="1100" dirty="0"/>
+          </a:p>
+          <a:p>
+            <a:pPr indent="0" marL="0">
+              <a:lnSpc>
+                <a:spcPct val="118000"/>
+              </a:lnSpc>
+              <a:buNone/>
+            </a:pPr>
+            <a:endParaRPr lang="en-US" sz="1100" dirty="0"/>
+          </a:p>
+          <a:p>
+            <a:pPr indent="0" marL="0">
+              <a:lnSpc>
+                <a:spcPct val="118000"/>
+              </a:lnSpc>
+              <a:buNone/>
+            </a:pPr>
+            <a:r>
+              <a:rPr lang="en-US" sz="1100" dirty="0">
+                <a:solidFill>
+                  <a:srgbClr val="101828"/>
+                </a:solidFill>
+                <a:latin typeface="IBM Plex Sans" pitchFamily="34" charset="0"/>
+                <a:ea typeface="IBM Plex Sans" pitchFamily="34" charset="-122"/>
+                <a:cs typeface="IBM Plex Sans" pitchFamily="34" charset="-120"/>
+              </a:rPr>
+              <a:t>The counter has to survive the loop, so it is set before it and output after it.</a:t>
+            </a:r>
+            <a:endParaRPr lang="en-US" sz="1100" dirty="0"/>
+          </a:p>
+        </p:txBody>
+      </p:sp>
+      <p:sp>
+        <p:nvSpPr>
+          <p:cNvPr id="13" name="Shape 11"/>
+          <p:cNvSpPr/>
+          <p:nvPr/>
+        </p:nvSpPr>
+        <p:spPr>
+          <a:xfrm>
+            <a:off x="8092440" y="1719072"/>
+            <a:ext cx="3566160" cy="2016811"/>
+          </a:xfrm>
+          <a:prstGeom prst="roundRect">
+            <a:avLst>
+              <a:gd name="adj" fmla="val 5441"/>
+            </a:avLst>
+          </a:prstGeom>
+          <a:solidFill>
+            <a:srgbClr val="FFFFFF"/>
+          </a:solidFill>
+          <a:ln w="15875">
+            <a:solidFill>
+              <a:srgbClr val="D9DEE7"/>
+            </a:solidFill>
+            <a:prstDash val="solid"/>
+          </a:ln>
+        </p:spPr>
+      </p:sp>
+      <p:sp>
+        <p:nvSpPr>
+          <p:cNvPr id="14" name="Text 12"/>
+          <p:cNvSpPr txBox="1"/>
+          <p:nvPr/>
+        </p:nvSpPr>
+        <p:spPr>
+          <a:xfrm>
+            <a:off x="8366760" y="1883664"/>
+            <a:ext cx="3017520" cy="292608"/>
+          </a:xfrm>
+          <a:prstGeom prst="rect">
+            <a:avLst/>
+          </a:prstGeom>
+          <a:noFill/>
+          <a:ln/>
+        </p:spPr>
+        <p:txBody>
+          <a:bodyPr wrap="square" lIns="0" tIns="0" rIns="0" bIns="0" rtlCol="0" anchor="ctr"/>
+          <a:lstStyle/>
+          <a:p>
+            <a:pPr indent="0" marL="0">
+              <a:buNone/>
+            </a:pPr>
+            <a:r>
+              <a:rPr lang="en-US" sz="1100" b="1" dirty="0">
+                <a:solidFill>
+                  <a:srgbClr val="667085"/>
+                </a:solidFill>
+                <a:latin typeface="IBM Plex Mono" pitchFamily="34" charset="0"/>
+                <a:ea typeface="IBM Plex Mono" pitchFamily="34" charset="-122"/>
+                <a:cs typeface="IBM Plex Mono" pitchFamily="34" charset="-120"/>
+              </a:rPr>
+              <a:t>HOW I BUILD IT</a:t>
+            </a:r>
+            <a:endParaRPr lang="en-US" sz="1100" dirty="0"/>
+          </a:p>
+        </p:txBody>
+      </p:sp>
+      <p:sp>
+        <p:nvSpPr>
+          <p:cNvPr id="15" name="Text 13"/>
+          <p:cNvSpPr txBox="1"/>
+          <p:nvPr/>
+        </p:nvSpPr>
+        <p:spPr>
+          <a:xfrm>
+            <a:off x="8366760" y="2231136"/>
+            <a:ext cx="3017520" cy="1358443"/>
+          </a:xfrm>
+          <a:prstGeom prst="rect">
+            <a:avLst/>
+          </a:prstGeom>
+          <a:noFill/>
+          <a:ln/>
+        </p:spPr>
+        <p:txBody>
+          <a:bodyPr wrap="square" lIns="0" tIns="0" rIns="0" bIns="0" rtlCol="0" anchor="t"/>
+          <a:lstStyle/>
+          <a:p>
+            <a:pPr indent="0" marL="0">
+              <a:lnSpc>
+                <a:spcPct val="118000"/>
+              </a:lnSpc>
+              <a:buNone/>
+            </a:pPr>
+            <a:r>
+              <a:rPr lang="en-US" sz="1100" dirty="0">
+                <a:solidFill>
+                  <a:srgbClr val="101828"/>
+                </a:solidFill>
+                <a:latin typeface="IBM Plex Sans" pitchFamily="34" charset="0"/>
+                <a:ea typeface="IBM Plex Sans" pitchFamily="34" charset="-122"/>
+                <a:cs typeface="IBM Plex Sans" pitchFamily="34" charset="-120"/>
+              </a:rPr>
+              <a:t>Counter set to 0 BEFORE the loop.</a:t>
+            </a:r>
+            <a:endParaRPr lang="en-US" sz="1100" dirty="0"/>
+          </a:p>
+          <a:p>
+            <a:pPr indent="0" marL="0">
+              <a:lnSpc>
+                <a:spcPct val="118000"/>
+              </a:lnSpc>
+              <a:buNone/>
+            </a:pPr>
+            <a:r>
+              <a:rPr lang="en-US" sz="1100" dirty="0">
+                <a:solidFill>
+                  <a:srgbClr val="101828"/>
+                </a:solidFill>
+                <a:latin typeface="IBM Plex Sans" pitchFamily="34" charset="0"/>
+                <a:ea typeface="IBM Plex Sans" pitchFamily="34" charset="-122"/>
+                <a:cs typeface="IBM Plex Sans" pitchFamily="34" charset="-120"/>
+              </a:rPr>
+              <a:t>for i = 0 to 7 is eight passes, not nine.</a:t>
+            </a:r>
+            <a:endParaRPr lang="en-US" sz="1100" dirty="0"/>
+          </a:p>
+          <a:p>
+            <a:pPr indent="0" marL="0">
+              <a:lnSpc>
+                <a:spcPct val="118000"/>
+              </a:lnSpc>
+              <a:buNone/>
+            </a:pPr>
+            <a:r>
+              <a:rPr lang="en-US" sz="1100" dirty="0">
+                <a:solidFill>
+                  <a:srgbClr val="101828"/>
+                </a:solidFill>
+                <a:latin typeface="IBM Plex Sans" pitchFamily="34" charset="0"/>
+                <a:ea typeface="IBM Plex Sans" pitchFamily="34" charset="-122"/>
+                <a:cs typeface="IBM Plex Sans" pitchFamily="34" charset="-120"/>
+              </a:rPr>
+              <a:t>18 or over is &gt;=, not &gt;.</a:t>
+            </a:r>
+            <a:endParaRPr lang="en-US" sz="1100" dirty="0"/>
+          </a:p>
+          <a:p>
+            <a:pPr indent="0" marL="0">
+              <a:lnSpc>
+                <a:spcPct val="118000"/>
+              </a:lnSpc>
+              <a:buNone/>
+            </a:pPr>
+            <a:r>
+              <a:rPr lang="en-US" sz="1100" dirty="0">
+                <a:solidFill>
+                  <a:srgbClr val="101828"/>
+                </a:solidFill>
+                <a:latin typeface="IBM Plex Sans" pitchFamily="34" charset="0"/>
+                <a:ea typeface="IBM Plex Sans" pitchFamily="34" charset="-122"/>
+                <a:cs typeface="IBM Plex Sans" pitchFamily="34" charset="-120"/>
+              </a:rPr>
+              <a:t>Output AFTER the loop, not inside it.</a:t>
+            </a:r>
+            <a:endParaRPr lang="en-US" sz="1100" dirty="0"/>
+          </a:p>
+        </p:txBody>
+      </p:sp>
+      <p:sp>
+        <p:nvSpPr>
+          <p:cNvPr id="16" name="Shape 14"/>
+          <p:cNvSpPr/>
+          <p:nvPr/>
+        </p:nvSpPr>
+        <p:spPr>
+          <a:xfrm>
+            <a:off x="502920" y="3873043"/>
+            <a:ext cx="11155680" cy="2463749"/>
+          </a:xfrm>
+          <a:prstGeom prst="roundRect">
+            <a:avLst>
+              <a:gd name="adj" fmla="val 4454"/>
+            </a:avLst>
+          </a:prstGeom>
+          <a:solidFill>
+            <a:srgbClr val="FFFFFF"/>
+          </a:solidFill>
+          <a:ln w="15875">
+            <a:solidFill>
+              <a:srgbClr val="08A6A6"/>
+            </a:solidFill>
+            <a:prstDash val="solid"/>
+          </a:ln>
+        </p:spPr>
+      </p:sp>
+      <p:sp>
+        <p:nvSpPr>
+          <p:cNvPr id="17" name="Text 15"/>
+          <p:cNvSpPr txBox="1"/>
+          <p:nvPr/>
+        </p:nvSpPr>
+        <p:spPr>
+          <a:xfrm>
+            <a:off x="868680" y="4037635"/>
+            <a:ext cx="10424160" cy="292608"/>
+          </a:xfrm>
+          <a:prstGeom prst="rect">
+            <a:avLst/>
+          </a:prstGeom>
+          <a:noFill/>
+          <a:ln/>
+        </p:spPr>
+        <p:txBody>
+          <a:bodyPr wrap="square" lIns="0" tIns="0" rIns="0" bIns="0" rtlCol="0" anchor="ctr"/>
+          <a:lstStyle/>
+          <a:p>
+            <a:pPr indent="0" marL="0">
+              <a:buNone/>
+            </a:pPr>
+            <a:r>
+              <a:rPr lang="en-US" sz="1100" b="1" dirty="0">
+                <a:solidFill>
+                  <a:srgbClr val="08A6A6"/>
+                </a:solidFill>
+                <a:latin typeface="IBM Plex Mono" pitchFamily="34" charset="0"/>
+                <a:ea typeface="IBM Plex Mono" pitchFamily="34" charset="-122"/>
+                <a:cs typeface="IBM Plex Mono" pitchFamily="34" charset="-120"/>
+              </a:rPr>
+              <a:t>THE FINISHED PSEUDOCODE</a:t>
+            </a:r>
+            <a:endParaRPr lang="en-US" sz="1100" dirty="0"/>
+          </a:p>
+        </p:txBody>
+      </p:sp>
+      <p:sp>
+        <p:nvSpPr>
+          <p:cNvPr id="18" name="Text 16"/>
+          <p:cNvSpPr txBox="1"/>
+          <p:nvPr/>
+        </p:nvSpPr>
+        <p:spPr>
+          <a:xfrm>
+            <a:off x="868680" y="4385107"/>
+            <a:ext cx="10424160" cy="1841957"/>
+          </a:xfrm>
+          <a:prstGeom prst="rect">
+            <a:avLst/>
+          </a:prstGeom>
+          <a:noFill/>
+          <a:ln/>
+        </p:spPr>
+        <p:txBody>
+          <a:bodyPr wrap="square" lIns="0" tIns="0" rIns="0" bIns="0" rtlCol="0" anchor="t"/>
+          <a:lstStyle/>
+          <a:p>
+            <a:pPr indent="0" marL="0">
+              <a:lnSpc>
+                <a:spcPct val="120000"/>
+              </a:lnSpc>
+              <a:buNone/>
+            </a:pPr>
+            <a:r>
+              <a:rPr lang="en-US" sz="1300" dirty="0">
+                <a:solidFill>
+                  <a:srgbClr val="101828"/>
+                </a:solidFill>
+                <a:latin typeface="IBM Plex Sans" pitchFamily="34" charset="0"/>
+                <a:ea typeface="IBM Plex Sans" pitchFamily="34" charset="-122"/>
+                <a:cs typeface="IBM Plex Sans" pitchFamily="34" charset="-120"/>
+              </a:rPr>
+              <a:t>total = 0</a:t>
+            </a:r>
+            <a:endParaRPr lang="en-US" sz="1300" dirty="0"/>
+          </a:p>
+          <a:p>
+            <a:pPr indent="0" marL="0">
+              <a:lnSpc>
+                <a:spcPct val="120000"/>
+              </a:lnSpc>
+              <a:buNone/>
+            </a:pPr>
+            <a:r>
+              <a:rPr lang="en-US" sz="1300" dirty="0">
+                <a:solidFill>
+                  <a:srgbClr val="101828"/>
+                </a:solidFill>
+                <a:latin typeface="IBM Plex Sans" pitchFamily="34" charset="0"/>
+                <a:ea typeface="IBM Plex Sans" pitchFamily="34" charset="-122"/>
+                <a:cs typeface="IBM Plex Sans" pitchFamily="34" charset="-120"/>
+              </a:rPr>
+              <a:t>for i = 0 to 7</a:t>
+            </a:r>
+            <a:endParaRPr lang="en-US" sz="1300" dirty="0"/>
+          </a:p>
+          <a:p>
+            <a:pPr indent="0" marL="0">
+              <a:lnSpc>
+                <a:spcPct val="120000"/>
+              </a:lnSpc>
+              <a:buNone/>
+            </a:pPr>
+            <a:r>
+              <a:rPr lang="en-US" sz="1300" dirty="0">
+                <a:solidFill>
+                  <a:srgbClr val="101828"/>
+                </a:solidFill>
+                <a:latin typeface="IBM Plex Sans" pitchFamily="34" charset="0"/>
+                <a:ea typeface="IBM Plex Sans" pitchFamily="34" charset="-122"/>
+                <a:cs typeface="IBM Plex Sans" pitchFamily="34" charset="-120"/>
+              </a:rPr>
+              <a:t>    age = input("Age: ")</a:t>
+            </a:r>
+            <a:endParaRPr lang="en-US" sz="1300" dirty="0"/>
+          </a:p>
+          <a:p>
+            <a:pPr indent="0" marL="0">
+              <a:lnSpc>
+                <a:spcPct val="120000"/>
+              </a:lnSpc>
+              <a:buNone/>
+            </a:pPr>
+            <a:r>
+              <a:rPr lang="en-US" sz="1300" dirty="0">
+                <a:solidFill>
+                  <a:srgbClr val="101828"/>
+                </a:solidFill>
+                <a:latin typeface="IBM Plex Sans" pitchFamily="34" charset="0"/>
+                <a:ea typeface="IBM Plex Sans" pitchFamily="34" charset="-122"/>
+                <a:cs typeface="IBM Plex Sans" pitchFamily="34" charset="-120"/>
+              </a:rPr>
+              <a:t>    if age &gt;= 18 then</a:t>
+            </a:r>
+            <a:endParaRPr lang="en-US" sz="1300" dirty="0"/>
+          </a:p>
+          <a:p>
+            <a:pPr indent="0" marL="0">
+              <a:lnSpc>
+                <a:spcPct val="120000"/>
+              </a:lnSpc>
+              <a:buNone/>
+            </a:pPr>
+            <a:r>
+              <a:rPr lang="en-US" sz="1300" dirty="0">
+                <a:solidFill>
+                  <a:srgbClr val="101828"/>
+                </a:solidFill>
+                <a:latin typeface="IBM Plex Sans" pitchFamily="34" charset="0"/>
+                <a:ea typeface="IBM Plex Sans" pitchFamily="34" charset="-122"/>
+                <a:cs typeface="IBM Plex Sans" pitchFamily="34" charset="-120"/>
+              </a:rPr>
+              <a:t>        total = total + 1</a:t>
+            </a:r>
+            <a:endParaRPr lang="en-US" sz="1300" dirty="0"/>
+          </a:p>
+          <a:p>
+            <a:pPr indent="0" marL="0">
+              <a:lnSpc>
+                <a:spcPct val="120000"/>
+              </a:lnSpc>
+              <a:buNone/>
+            </a:pPr>
+            <a:r>
+              <a:rPr lang="en-US" sz="1300" dirty="0">
+                <a:solidFill>
+                  <a:srgbClr val="101828"/>
+                </a:solidFill>
+                <a:latin typeface="IBM Plex Sans" pitchFamily="34" charset="0"/>
+                <a:ea typeface="IBM Plex Sans" pitchFamily="34" charset="-122"/>
+                <a:cs typeface="IBM Plex Sans" pitchFamily="34" charset="-120"/>
+              </a:rPr>
+              <a:t>    endif</a:t>
+            </a:r>
+            <a:endParaRPr lang="en-US" sz="1300" dirty="0"/>
+          </a:p>
+          <a:p>
+            <a:pPr indent="0" marL="0">
+              <a:lnSpc>
+                <a:spcPct val="120000"/>
+              </a:lnSpc>
+              <a:buNone/>
+            </a:pPr>
+            <a:r>
+              <a:rPr lang="en-US" sz="1300" dirty="0">
+                <a:solidFill>
+                  <a:srgbClr val="101828"/>
+                </a:solidFill>
+                <a:latin typeface="IBM Plex Sans" pitchFamily="34" charset="0"/>
+                <a:ea typeface="IBM Plex Sans" pitchFamily="34" charset="-122"/>
+                <a:cs typeface="IBM Plex Sans" pitchFamily="34" charset="-120"/>
+              </a:rPr>
+              <a:t>next i</a:t>
+            </a:r>
+            <a:endParaRPr lang="en-US" sz="1300" dirty="0"/>
+          </a:p>
+          <a:p>
+            <a:pPr indent="0" marL="0">
+              <a:lnSpc>
+                <a:spcPct val="120000"/>
+              </a:lnSpc>
+              <a:buNone/>
+            </a:pPr>
+            <a:r>
+              <a:rPr lang="en-US" sz="1300" dirty="0">
+                <a:solidFill>
+                  <a:srgbClr val="101828"/>
+                </a:solidFill>
+                <a:latin typeface="IBM Plex Sans" pitchFamily="34" charset="0"/>
+                <a:ea typeface="IBM Plex Sans" pitchFamily="34" charset="-122"/>
+                <a:cs typeface="IBM Plex Sans" pitchFamily="34" charset="-120"/>
+              </a:rPr>
+              <a:t>print(total)</a:t>
+            </a:r>
+            <a:endParaRPr lang="en-US" sz="1300" dirty="0"/>
           </a:p>
         </p:txBody>
       </p:sp>
@@ -3281,14 +4028,75 @@
       </p:sp>
       <p:sp>
         <p:nvSpPr>
-          <p:cNvPr id="5" name="Text 3"/>
-          <p:cNvSpPr txBox="1"/>
-          <p:nvPr/>
-        </p:nvSpPr>
-        <p:spPr>
-          <a:xfrm>
-            <a:off x="502920" y="411480"/>
-            <a:ext cx="11155680" cy="777240"/>
+          <p:cNvPr id="5" name="Shape 3"/>
+          <p:cNvSpPr/>
+          <p:nvPr/>
+        </p:nvSpPr>
+        <p:spPr>
+          <a:xfrm>
+            <a:off x="502920" y="457200"/>
+            <a:ext cx="1051560" cy="420624"/>
+          </a:xfrm>
+          <a:prstGeom prst="roundRect">
+            <a:avLst>
+              <a:gd name="adj" fmla="val 21739"/>
+            </a:avLst>
+          </a:prstGeom>
+          <a:solidFill>
+            <a:srgbClr val="F4B942"/>
+          </a:solidFill>
+          <a:ln/>
+        </p:spPr>
+      </p:sp>
+      <p:sp>
+        <p:nvSpPr>
+          <p:cNvPr id="6" name="Text 4"/>
+          <p:cNvSpPr txBox="1"/>
+          <p:nvPr/>
+        </p:nvSpPr>
+        <p:spPr>
+          <a:xfrm>
+            <a:off x="502920" y="457200"/>
+            <a:ext cx="1051560" cy="420624"/>
+          </a:xfrm>
+          <a:prstGeom prst="rect">
+            <a:avLst/>
+          </a:prstGeom>
+          <a:noFill/>
+          <a:ln/>
+        </p:spPr>
+        <p:txBody>
+          <a:bodyPr wrap="square" lIns="0" tIns="0" rIns="0" bIns="0" rtlCol="0" anchor="ctr"/>
+          <a:lstStyle/>
+          <a:p>
+            <a:pPr algn="ctr" indent="0" marL="0">
+              <a:buNone/>
+            </a:pPr>
+            <a:r>
+              <a:rPr lang="en-US" sz="1200" b="1" dirty="0">
+                <a:solidFill>
+                  <a:srgbClr val="101828"/>
+                </a:solidFill>
+                <a:latin typeface="IBM Plex Mono" pitchFamily="34" charset="0"/>
+                <a:ea typeface="IBM Plex Mono" pitchFamily="34" charset="-122"/>
+                <a:cs typeface="IBM Plex Mono" pitchFamily="34" charset="-120"/>
+              </a:rPr>
+              <a:t>CHECK</a:t>
+            </a:r>
+            <a:endParaRPr lang="en-US" sz="1200" dirty="0"/>
+          </a:p>
+        </p:txBody>
+      </p:sp>
+      <p:sp>
+        <p:nvSpPr>
+          <p:cNvPr id="7" name="Text 5"/>
+          <p:cNvSpPr txBox="1"/>
+          <p:nvPr/>
+        </p:nvSpPr>
+        <p:spPr>
+          <a:xfrm>
+            <a:off x="1737360" y="457200"/>
+            <a:ext cx="9875520" cy="420624"/>
           </a:xfrm>
           <a:prstGeom prst="rect">
             <a:avLst/>
@@ -3304,30 +4112,30 @@
               <a:buNone/>
             </a:pPr>
             <a:r>
-              <a:rPr lang="en-US" sz="3200" b="1" dirty="0">
-                <a:solidFill>
-                  <a:srgbClr val="101828"/>
+              <a:rPr lang="en-US" sz="1500" dirty="0">
+                <a:solidFill>
+                  <a:srgbClr val="667085"/>
                 </a:solidFill>
                 <a:latin typeface="IBM Plex Sans" pitchFamily="34" charset="0"/>
                 <a:ea typeface="IBM Plex Sans" pitchFamily="34" charset="-122"/>
                 <a:cs typeface="IBM Plex Sans" pitchFamily="34" charset="-120"/>
               </a:rPr>
-              <a:t>Worth knowing</a:t>
-            </a:r>
-            <a:endParaRPr lang="en-US" sz="3200" dirty="0"/>
-          </a:p>
-        </p:txBody>
-      </p:sp>
-      <p:sp>
-        <p:nvSpPr>
-          <p:cNvPr id="6" name="Text 4"/>
-          <p:cNvSpPr txBox="1"/>
-          <p:nvPr/>
-        </p:nvSpPr>
-        <p:spPr>
-          <a:xfrm>
-            <a:off x="502920" y="1170432"/>
-            <a:ext cx="11155680" cy="411480"/>
+              <a:t>Hands down. Everyone commits.</a:t>
+            </a:r>
+            <a:endParaRPr lang="en-US" sz="1500" dirty="0"/>
+          </a:p>
+        </p:txBody>
+      </p:sp>
+      <p:sp>
+        <p:nvSpPr>
+          <p:cNvPr id="8" name="Text 6"/>
+          <p:cNvSpPr txBox="1"/>
+          <p:nvPr/>
+        </p:nvSpPr>
+        <p:spPr>
+          <a:xfrm>
+            <a:off x="502920" y="1097280"/>
+            <a:ext cx="11155680" cy="914400"/>
           </a:xfrm>
           <a:prstGeom prst="rect">
             <a:avLst/>
@@ -3340,37 +4148,40 @@
           <a:lstStyle/>
           <a:p>
             <a:pPr indent="0" marL="0">
-              <a:buNone/>
-            </a:pPr>
-            <a:r>
-              <a:rPr lang="en-US" sz="1500" dirty="0">
-                <a:solidFill>
-                  <a:srgbClr val="667085"/>
+              <a:lnSpc>
+                <a:spcPct val="115000"/>
+              </a:lnSpc>
+              <a:buNone/>
+            </a:pPr>
+            <a:r>
+              <a:rPr lang="en-US" sz="2600" b="1" dirty="0">
+                <a:solidFill>
+                  <a:srgbClr val="101828"/>
                 </a:solidFill>
                 <a:latin typeface="IBM Plex Sans" pitchFamily="34" charset="0"/>
                 <a:ea typeface="IBM Plex Sans" pitchFamily="34" charset="-122"/>
                 <a:cs typeface="IBM Plex Sans" pitchFamily="34" charset="-120"/>
               </a:rPr>
-              <a:t>The information markers dotted around the room</a:t>
-            </a:r>
-            <a:endParaRPr lang="en-US" sz="1500" dirty="0"/>
-          </a:p>
-        </p:txBody>
-      </p:sp>
-      <p:sp>
-        <p:nvSpPr>
-          <p:cNvPr id="7" name="Shape 5"/>
+              <a:t>How many times does 'for i = 1 to 5' run its body?</a:t>
+            </a:r>
+            <a:endParaRPr lang="en-US" sz="2600" dirty="0"/>
+          </a:p>
+        </p:txBody>
+      </p:sp>
+      <p:sp>
+        <p:nvSpPr>
+          <p:cNvPr id="9" name="Shape 7"/>
           <p:cNvSpPr/>
           <p:nvPr/>
         </p:nvSpPr>
         <p:spPr>
           <a:xfrm>
-            <a:off x="502920" y="1828800"/>
-            <a:ext cx="5394960" cy="1737360"/>
+            <a:off x="502920" y="2148840"/>
+            <a:ext cx="11155680" cy="731520"/>
           </a:xfrm>
           <a:prstGeom prst="roundRect">
             <a:avLst>
-              <a:gd name="adj" fmla="val 6316"/>
+              <a:gd name="adj" fmla="val 15000"/>
             </a:avLst>
           </a:prstGeom>
           <a:solidFill>
@@ -3378,7 +4189,7 @@
           </a:solidFill>
           <a:ln w="15875">
             <a:solidFill>
-              <a:srgbClr val="2D63FF"/>
+              <a:srgbClr val="D9DEE7"/>
             </a:solidFill>
             <a:prstDash val="solid"/>
           </a:ln>
@@ -3386,14 +4197,75 @@
       </p:sp>
       <p:sp>
         <p:nvSpPr>
-          <p:cNvPr id="8" name="Text 6"/>
-          <p:cNvSpPr txBox="1"/>
-          <p:nvPr/>
-        </p:nvSpPr>
-        <p:spPr>
-          <a:xfrm>
-            <a:off x="822960" y="2011680"/>
-            <a:ext cx="4754880" cy="365760"/>
+          <p:cNvPr id="10" name="Shape 8"/>
+          <p:cNvSpPr/>
+          <p:nvPr/>
+        </p:nvSpPr>
+        <p:spPr>
+          <a:xfrm>
+            <a:off x="777240" y="2295144"/>
+            <a:ext cx="438912" cy="438912"/>
+          </a:xfrm>
+          <a:prstGeom prst="roundRect">
+            <a:avLst>
+              <a:gd name="adj" fmla="val 20833"/>
+            </a:avLst>
+          </a:prstGeom>
+          <a:solidFill>
+            <a:srgbClr val="EEF2FB"/>
+          </a:solidFill>
+          <a:ln/>
+        </p:spPr>
+      </p:sp>
+      <p:sp>
+        <p:nvSpPr>
+          <p:cNvPr id="11" name="Text 9"/>
+          <p:cNvSpPr txBox="1"/>
+          <p:nvPr/>
+        </p:nvSpPr>
+        <p:spPr>
+          <a:xfrm>
+            <a:off x="777240" y="2295144"/>
+            <a:ext cx="438912" cy="438912"/>
+          </a:xfrm>
+          <a:prstGeom prst="rect">
+            <a:avLst/>
+          </a:prstGeom>
+          <a:noFill/>
+          <a:ln/>
+        </p:spPr>
+        <p:txBody>
+          <a:bodyPr wrap="square" lIns="0" tIns="0" rIns="0" bIns="0" rtlCol="0" anchor="ctr"/>
+          <a:lstStyle/>
+          <a:p>
+            <a:pPr algn="ctr" indent="0" marL="0">
+              <a:buNone/>
+            </a:pPr>
+            <a:r>
+              <a:rPr lang="en-US" sz="1300" b="1" dirty="0">
+                <a:solidFill>
+                  <a:srgbClr val="2D63FF"/>
+                </a:solidFill>
+                <a:latin typeface="IBM Plex Mono" pitchFamily="34" charset="0"/>
+                <a:ea typeface="IBM Plex Mono" pitchFamily="34" charset="-122"/>
+                <a:cs typeface="IBM Plex Mono" pitchFamily="34" charset="-120"/>
+              </a:rPr>
+              <a:t>A</a:t>
+            </a:r>
+            <a:endParaRPr lang="en-US" sz="1300" dirty="0"/>
+          </a:p>
+        </p:txBody>
+      </p:sp>
+      <p:sp>
+        <p:nvSpPr>
+          <p:cNvPr id="12" name="Text 10"/>
+          <p:cNvSpPr txBox="1"/>
+          <p:nvPr/>
+        </p:nvSpPr>
+        <p:spPr>
+          <a:xfrm>
+            <a:off x="1417320" y="2148840"/>
+            <a:ext cx="10058400" cy="731520"/>
           </a:xfrm>
           <a:prstGeom prst="rect">
             <a:avLst/>
@@ -3406,79 +4278,40 @@
           <a:lstStyle/>
           <a:p>
             <a:pPr indent="0" marL="0">
-              <a:buNone/>
-            </a:pPr>
-            <a:r>
-              <a:rPr lang="en-US" sz="1600" b="1" dirty="0">
-                <a:solidFill>
-                  <a:srgbClr val="2D63FF"/>
+              <a:lnSpc>
+                <a:spcPct val="115000"/>
+              </a:lnSpc>
+              <a:buNone/>
+            </a:pPr>
+            <a:r>
+              <a:rPr lang="en-US" sz="1700" dirty="0">
+                <a:solidFill>
+                  <a:srgbClr val="101828"/>
                 </a:solidFill>
                 <a:latin typeface="IBM Plex Sans" pitchFamily="34" charset="0"/>
                 <a:ea typeface="IBM Plex Sans" pitchFamily="34" charset="-122"/>
                 <a:cs typeface="IBM Plex Sans" pitchFamily="34" charset="-120"/>
               </a:rPr>
-              <a:t>No standard</a:t>
-            </a:r>
-            <a:endParaRPr lang="en-US" sz="1600" dirty="0"/>
-          </a:p>
-        </p:txBody>
-      </p:sp>
-      <p:sp>
-        <p:nvSpPr>
-          <p:cNvPr id="9" name="Text 7"/>
-          <p:cNvSpPr txBox="1"/>
-          <p:nvPr/>
-        </p:nvSpPr>
-        <p:spPr>
-          <a:xfrm>
-            <a:off x="822960" y="2395728"/>
-            <a:ext cx="4754880" cy="1005840"/>
-          </a:xfrm>
-          <a:prstGeom prst="rect">
-            <a:avLst/>
-          </a:prstGeom>
-          <a:noFill/>
-          <a:ln/>
-        </p:spPr>
-        <p:txBody>
-          <a:bodyPr wrap="square" lIns="0" tIns="0" rIns="0" bIns="0" rtlCol="0" anchor="t"/>
-          <a:lstStyle/>
-          <a:p>
-            <a:pPr indent="0" marL="0">
-              <a:lnSpc>
-                <a:spcPct val="120000"/>
-              </a:lnSpc>
-              <a:buNone/>
-            </a:pPr>
-            <a:r>
-              <a:rPr lang="en-US" sz="1300" dirty="0">
-                <a:solidFill>
-                  <a:srgbClr val="667085"/>
-                </a:solidFill>
-                <a:latin typeface="IBM Plex Sans" pitchFamily="34" charset="0"/>
-                <a:ea typeface="IBM Plex Sans" pitchFamily="34" charset="-122"/>
-                <a:cs typeface="IBM Plex Sans" pitchFamily="34" charset="-120"/>
-              </a:rPr>
-              <a:t>There is no official pseudocode. Every exam board and textbook has its own, which is why OCR publishes a reference guide.</a:t>
-            </a:r>
-            <a:endParaRPr lang="en-US" sz="1300" dirty="0"/>
-          </a:p>
-        </p:txBody>
-      </p:sp>
-      <p:sp>
-        <p:nvSpPr>
-          <p:cNvPr id="10" name="Shape 8"/>
+              <a:t>Four</a:t>
+            </a:r>
+            <a:endParaRPr lang="en-US" sz="1700" dirty="0"/>
+          </a:p>
+        </p:txBody>
+      </p:sp>
+      <p:sp>
+        <p:nvSpPr>
+          <p:cNvPr id="13" name="Shape 11"/>
           <p:cNvSpPr/>
           <p:nvPr/>
         </p:nvSpPr>
         <p:spPr>
           <a:xfrm>
-            <a:off x="6217920" y="1828800"/>
-            <a:ext cx="5394960" cy="1737360"/>
+            <a:off x="502920" y="3017520"/>
+            <a:ext cx="11155680" cy="731520"/>
           </a:xfrm>
           <a:prstGeom prst="roundRect">
             <a:avLst>
-              <a:gd name="adj" fmla="val 6316"/>
+              <a:gd name="adj" fmla="val 15000"/>
             </a:avLst>
           </a:prstGeom>
           <a:solidFill>
@@ -3486,7 +4319,7 @@
           </a:solidFill>
           <a:ln w="15875">
             <a:solidFill>
-              <a:srgbClr val="08A6A6"/>
+              <a:srgbClr val="D9DEE7"/>
             </a:solidFill>
             <a:prstDash val="solid"/>
           </a:ln>
@@ -3494,14 +4327,75 @@
       </p:sp>
       <p:sp>
         <p:nvSpPr>
-          <p:cNvPr id="11" name="Text 9"/>
-          <p:cNvSpPr txBox="1"/>
-          <p:nvPr/>
-        </p:nvSpPr>
-        <p:spPr>
-          <a:xfrm>
-            <a:off x="6537960" y="2011680"/>
-            <a:ext cx="4754880" cy="365760"/>
+          <p:cNvPr id="14" name="Shape 12"/>
+          <p:cNvSpPr/>
+          <p:nvPr/>
+        </p:nvSpPr>
+        <p:spPr>
+          <a:xfrm>
+            <a:off x="777240" y="3163824"/>
+            <a:ext cx="438912" cy="438912"/>
+          </a:xfrm>
+          <a:prstGeom prst="roundRect">
+            <a:avLst>
+              <a:gd name="adj" fmla="val 20833"/>
+            </a:avLst>
+          </a:prstGeom>
+          <a:solidFill>
+            <a:srgbClr val="EEF2FB"/>
+          </a:solidFill>
+          <a:ln/>
+        </p:spPr>
+      </p:sp>
+      <p:sp>
+        <p:nvSpPr>
+          <p:cNvPr id="15" name="Text 13"/>
+          <p:cNvSpPr txBox="1"/>
+          <p:nvPr/>
+        </p:nvSpPr>
+        <p:spPr>
+          <a:xfrm>
+            <a:off x="777240" y="3163824"/>
+            <a:ext cx="438912" cy="438912"/>
+          </a:xfrm>
+          <a:prstGeom prst="rect">
+            <a:avLst/>
+          </a:prstGeom>
+          <a:noFill/>
+          <a:ln/>
+        </p:spPr>
+        <p:txBody>
+          <a:bodyPr wrap="square" lIns="0" tIns="0" rIns="0" bIns="0" rtlCol="0" anchor="ctr"/>
+          <a:lstStyle/>
+          <a:p>
+            <a:pPr algn="ctr" indent="0" marL="0">
+              <a:buNone/>
+            </a:pPr>
+            <a:r>
+              <a:rPr lang="en-US" sz="1300" b="1" dirty="0">
+                <a:solidFill>
+                  <a:srgbClr val="2D63FF"/>
+                </a:solidFill>
+                <a:latin typeface="IBM Plex Mono" pitchFamily="34" charset="0"/>
+                <a:ea typeface="IBM Plex Mono" pitchFamily="34" charset="-122"/>
+                <a:cs typeface="IBM Plex Mono" pitchFamily="34" charset="-120"/>
+              </a:rPr>
+              <a:t>B</a:t>
+            </a:r>
+            <a:endParaRPr lang="en-US" sz="1300" dirty="0"/>
+          </a:p>
+        </p:txBody>
+      </p:sp>
+      <p:sp>
+        <p:nvSpPr>
+          <p:cNvPr id="16" name="Text 14"/>
+          <p:cNvSpPr txBox="1"/>
+          <p:nvPr/>
+        </p:nvSpPr>
+        <p:spPr>
+          <a:xfrm>
+            <a:off x="1417320" y="3017520"/>
+            <a:ext cx="10058400" cy="731520"/>
           </a:xfrm>
           <a:prstGeom prst="rect">
             <a:avLst/>
@@ -3514,79 +4408,40 @@
           <a:lstStyle/>
           <a:p>
             <a:pPr indent="0" marL="0">
-              <a:buNone/>
-            </a:pPr>
-            <a:r>
-              <a:rPr lang="en-US" sz="1600" b="1" dirty="0">
-                <a:solidFill>
-                  <a:srgbClr val="08A6A6"/>
+              <a:lnSpc>
+                <a:spcPct val="115000"/>
+              </a:lnSpc>
+              <a:buNone/>
+            </a:pPr>
+            <a:r>
+              <a:rPr lang="en-US" sz="1700" dirty="0">
+                <a:solidFill>
+                  <a:srgbClr val="101828"/>
                 </a:solidFill>
                 <a:latin typeface="IBM Plex Sans" pitchFamily="34" charset="0"/>
                 <a:ea typeface="IBM Plex Sans" pitchFamily="34" charset="-122"/>
                 <a:cs typeface="IBM Plex Sans" pitchFamily="34" charset="-120"/>
               </a:rPr>
-              <a:t>Close to Python</a:t>
-            </a:r>
-            <a:endParaRPr lang="en-US" sz="1600" dirty="0"/>
-          </a:p>
-        </p:txBody>
-      </p:sp>
-      <p:sp>
-        <p:nvSpPr>
-          <p:cNvPr id="12" name="Text 10"/>
-          <p:cNvSpPr txBox="1"/>
-          <p:nvPr/>
-        </p:nvSpPr>
-        <p:spPr>
-          <a:xfrm>
-            <a:off x="6537960" y="2395728"/>
-            <a:ext cx="4754880" cy="1005840"/>
-          </a:xfrm>
-          <a:prstGeom prst="rect">
-            <a:avLst/>
-          </a:prstGeom>
-          <a:noFill/>
-          <a:ln/>
-        </p:spPr>
-        <p:txBody>
-          <a:bodyPr wrap="square" lIns="0" tIns="0" rIns="0" bIns="0" rtlCol="0" anchor="t"/>
-          <a:lstStyle/>
-          <a:p>
-            <a:pPr indent="0" marL="0">
-              <a:lnSpc>
-                <a:spcPct val="120000"/>
-              </a:lnSpc>
-              <a:buNone/>
-            </a:pPr>
-            <a:r>
-              <a:rPr lang="en-US" sz="1300" dirty="0">
-                <a:solidFill>
-                  <a:srgbClr val="667085"/>
-                </a:solidFill>
-                <a:latin typeface="IBM Plex Sans" pitchFamily="34" charset="0"/>
-                <a:ea typeface="IBM Plex Sans" pitchFamily="34" charset="-122"/>
-                <a:cs typeface="IBM Plex Sans" pitchFamily="34" charset="-120"/>
-              </a:rPr>
-              <a:t>The reference language looks like Python on purpose, because so many schools teach Python, but the endif and next keywords are not Python.</a:t>
-            </a:r>
-            <a:endParaRPr lang="en-US" sz="1300" dirty="0"/>
-          </a:p>
-        </p:txBody>
-      </p:sp>
-      <p:sp>
-        <p:nvSpPr>
-          <p:cNvPr id="13" name="Shape 11"/>
+              <a:t>Six</a:t>
+            </a:r>
+            <a:endParaRPr lang="en-US" sz="1700" dirty="0"/>
+          </a:p>
+        </p:txBody>
+      </p:sp>
+      <p:sp>
+        <p:nvSpPr>
+          <p:cNvPr id="17" name="Shape 15"/>
           <p:cNvSpPr/>
           <p:nvPr/>
         </p:nvSpPr>
         <p:spPr>
           <a:xfrm>
-            <a:off x="502920" y="3794760"/>
-            <a:ext cx="5394960" cy="1737360"/>
+            <a:off x="502920" y="3886200"/>
+            <a:ext cx="11155680" cy="731520"/>
           </a:xfrm>
           <a:prstGeom prst="roundRect">
             <a:avLst>
-              <a:gd name="adj" fmla="val 6316"/>
+              <a:gd name="adj" fmla="val 15000"/>
             </a:avLst>
           </a:prstGeom>
           <a:solidFill>
@@ -3594,7 +4449,7 @@
           </a:solidFill>
           <a:ln w="15875">
             <a:solidFill>
-              <a:srgbClr val="2D63FF"/>
+              <a:srgbClr val="D9DEE7"/>
             </a:solidFill>
             <a:prstDash val="solid"/>
           </a:ln>
@@ -3602,14 +4457,75 @@
       </p:sp>
       <p:sp>
         <p:nvSpPr>
-          <p:cNvPr id="14" name="Text 12"/>
-          <p:cNvSpPr txBox="1"/>
-          <p:nvPr/>
-        </p:nvSpPr>
-        <p:spPr>
-          <a:xfrm>
-            <a:off x="822960" y="3977640"/>
-            <a:ext cx="4754880" cy="365760"/>
+          <p:cNvPr id="18" name="Shape 16"/>
+          <p:cNvSpPr/>
+          <p:nvPr/>
+        </p:nvSpPr>
+        <p:spPr>
+          <a:xfrm>
+            <a:off x="777240" y="4032504"/>
+            <a:ext cx="438912" cy="438912"/>
+          </a:xfrm>
+          <a:prstGeom prst="roundRect">
+            <a:avLst>
+              <a:gd name="adj" fmla="val 20833"/>
+            </a:avLst>
+          </a:prstGeom>
+          <a:solidFill>
+            <a:srgbClr val="EEF2FB"/>
+          </a:solidFill>
+          <a:ln/>
+        </p:spPr>
+      </p:sp>
+      <p:sp>
+        <p:nvSpPr>
+          <p:cNvPr id="19" name="Text 17"/>
+          <p:cNvSpPr txBox="1"/>
+          <p:nvPr/>
+        </p:nvSpPr>
+        <p:spPr>
+          <a:xfrm>
+            <a:off x="777240" y="4032504"/>
+            <a:ext cx="438912" cy="438912"/>
+          </a:xfrm>
+          <a:prstGeom prst="rect">
+            <a:avLst/>
+          </a:prstGeom>
+          <a:noFill/>
+          <a:ln/>
+        </p:spPr>
+        <p:txBody>
+          <a:bodyPr wrap="square" lIns="0" tIns="0" rIns="0" bIns="0" rtlCol="0" anchor="ctr"/>
+          <a:lstStyle/>
+          <a:p>
+            <a:pPr algn="ctr" indent="0" marL="0">
+              <a:buNone/>
+            </a:pPr>
+            <a:r>
+              <a:rPr lang="en-US" sz="1300" b="1" dirty="0">
+                <a:solidFill>
+                  <a:srgbClr val="2D63FF"/>
+                </a:solidFill>
+                <a:latin typeface="IBM Plex Mono" pitchFamily="34" charset="0"/>
+                <a:ea typeface="IBM Plex Mono" pitchFamily="34" charset="-122"/>
+                <a:cs typeface="IBM Plex Mono" pitchFamily="34" charset="-120"/>
+              </a:rPr>
+              <a:t>C</a:t>
+            </a:r>
+            <a:endParaRPr lang="en-US" sz="1300" dirty="0"/>
+          </a:p>
+        </p:txBody>
+      </p:sp>
+      <p:sp>
+        <p:nvSpPr>
+          <p:cNvPr id="20" name="Text 18"/>
+          <p:cNvSpPr txBox="1"/>
+          <p:nvPr/>
+        </p:nvSpPr>
+        <p:spPr>
+          <a:xfrm>
+            <a:off x="1417320" y="3886200"/>
+            <a:ext cx="10058400" cy="731520"/>
           </a:xfrm>
           <a:prstGeom prst="rect">
             <a:avLst/>
@@ -3622,79 +4538,40 @@
           <a:lstStyle/>
           <a:p>
             <a:pPr indent="0" marL="0">
-              <a:buNone/>
-            </a:pPr>
-            <a:r>
-              <a:rPr lang="en-US" sz="1600" b="1" dirty="0">
-                <a:solidFill>
-                  <a:srgbClr val="2D63FF"/>
+              <a:lnSpc>
+                <a:spcPct val="115000"/>
+              </a:lnSpc>
+              <a:buNone/>
+            </a:pPr>
+            <a:r>
+              <a:rPr lang="en-US" sz="1700" dirty="0">
+                <a:solidFill>
+                  <a:srgbClr val="101828"/>
                 </a:solidFill>
                 <a:latin typeface="IBM Plex Sans" pitchFamily="34" charset="0"/>
                 <a:ea typeface="IBM Plex Sans" pitchFamily="34" charset="-122"/>
                 <a:cs typeface="IBM Plex Sans" pitchFamily="34" charset="-120"/>
               </a:rPr>
-              <a:t>Zero indexing</a:t>
-            </a:r>
-            <a:endParaRPr lang="en-US" sz="1600" dirty="0"/>
-          </a:p>
-        </p:txBody>
-      </p:sp>
-      <p:sp>
-        <p:nvSpPr>
-          <p:cNvPr id="15" name="Text 13"/>
-          <p:cNvSpPr txBox="1"/>
-          <p:nvPr/>
-        </p:nvSpPr>
-        <p:spPr>
-          <a:xfrm>
-            <a:off x="822960" y="4361688"/>
-            <a:ext cx="4754880" cy="1005840"/>
-          </a:xfrm>
-          <a:prstGeom prst="rect">
-            <a:avLst/>
-          </a:prstGeom>
-          <a:noFill/>
-          <a:ln/>
-        </p:spPr>
-        <p:txBody>
-          <a:bodyPr wrap="square" lIns="0" tIns="0" rIns="0" bIns="0" rtlCol="0" anchor="t"/>
-          <a:lstStyle/>
-          <a:p>
-            <a:pPr indent="0" marL="0">
-              <a:lnSpc>
-                <a:spcPct val="120000"/>
-              </a:lnSpc>
-              <a:buNone/>
-            </a:pPr>
-            <a:r>
-              <a:rPr lang="en-US" sz="1300" dirty="0">
-                <a:solidFill>
-                  <a:srgbClr val="667085"/>
-                </a:solidFill>
-                <a:latin typeface="IBM Plex Sans" pitchFamily="34" charset="0"/>
-                <a:ea typeface="IBM Plex Sans" pitchFamily="34" charset="-122"/>
-                <a:cs typeface="IBM Plex Sans" pitchFamily="34" charset="-120"/>
-              </a:rPr>
-              <a:t>Arrays start at zero in most languages, a habit that comes from the arithmetic of memory addresses.</a:t>
-            </a:r>
-            <a:endParaRPr lang="en-US" sz="1300" dirty="0"/>
-          </a:p>
-        </p:txBody>
-      </p:sp>
-      <p:sp>
-        <p:nvSpPr>
-          <p:cNvPr id="16" name="Shape 14"/>
+              <a:t>It depends on i</a:t>
+            </a:r>
+            <a:endParaRPr lang="en-US" sz="1700" dirty="0"/>
+          </a:p>
+        </p:txBody>
+      </p:sp>
+      <p:sp>
+        <p:nvSpPr>
+          <p:cNvPr id="21" name="Shape 19"/>
           <p:cNvSpPr/>
           <p:nvPr/>
         </p:nvSpPr>
         <p:spPr>
           <a:xfrm>
-            <a:off x="6217920" y="3794760"/>
-            <a:ext cx="5394960" cy="1737360"/>
+            <a:off x="502920" y="4754880"/>
+            <a:ext cx="11155680" cy="731520"/>
           </a:xfrm>
           <a:prstGeom prst="roundRect">
             <a:avLst>
-              <a:gd name="adj" fmla="val 6316"/>
+              <a:gd name="adj" fmla="val 15000"/>
             </a:avLst>
           </a:prstGeom>
           <a:solidFill>
@@ -3702,7 +4579,7 @@
           </a:solidFill>
           <a:ln w="15875">
             <a:solidFill>
-              <a:srgbClr val="08A6A6"/>
+              <a:srgbClr val="D9DEE7"/>
             </a:solidFill>
             <a:prstDash val="solid"/>
           </a:ln>
@@ -3710,14 +4587,75 @@
       </p:sp>
       <p:sp>
         <p:nvSpPr>
-          <p:cNvPr id="17" name="Text 15"/>
-          <p:cNvSpPr txBox="1"/>
-          <p:nvPr/>
-        </p:nvSpPr>
-        <p:spPr>
-          <a:xfrm>
-            <a:off x="6537960" y="3977640"/>
-            <a:ext cx="4754880" cy="365760"/>
+          <p:cNvPr id="22" name="Shape 20"/>
+          <p:cNvSpPr/>
+          <p:nvPr/>
+        </p:nvSpPr>
+        <p:spPr>
+          <a:xfrm>
+            <a:off x="777240" y="4901184"/>
+            <a:ext cx="438912" cy="438912"/>
+          </a:xfrm>
+          <a:prstGeom prst="roundRect">
+            <a:avLst>
+              <a:gd name="adj" fmla="val 20833"/>
+            </a:avLst>
+          </a:prstGeom>
+          <a:solidFill>
+            <a:srgbClr val="EEF2FB"/>
+          </a:solidFill>
+          <a:ln/>
+        </p:spPr>
+      </p:sp>
+      <p:sp>
+        <p:nvSpPr>
+          <p:cNvPr id="23" name="Text 21"/>
+          <p:cNvSpPr txBox="1"/>
+          <p:nvPr/>
+        </p:nvSpPr>
+        <p:spPr>
+          <a:xfrm>
+            <a:off x="777240" y="4901184"/>
+            <a:ext cx="438912" cy="438912"/>
+          </a:xfrm>
+          <a:prstGeom prst="rect">
+            <a:avLst/>
+          </a:prstGeom>
+          <a:noFill/>
+          <a:ln/>
+        </p:spPr>
+        <p:txBody>
+          <a:bodyPr wrap="square" lIns="0" tIns="0" rIns="0" bIns="0" rtlCol="0" anchor="ctr"/>
+          <a:lstStyle/>
+          <a:p>
+            <a:pPr algn="ctr" indent="0" marL="0">
+              <a:buNone/>
+            </a:pPr>
+            <a:r>
+              <a:rPr lang="en-US" sz="1300" b="1" dirty="0">
+                <a:solidFill>
+                  <a:srgbClr val="2D63FF"/>
+                </a:solidFill>
+                <a:latin typeface="IBM Plex Mono" pitchFamily="34" charset="0"/>
+                <a:ea typeface="IBM Plex Mono" pitchFamily="34" charset="-122"/>
+                <a:cs typeface="IBM Plex Mono" pitchFamily="34" charset="-120"/>
+              </a:rPr>
+              <a:t>D</a:t>
+            </a:r>
+            <a:endParaRPr lang="en-US" sz="1300" dirty="0"/>
+          </a:p>
+        </p:txBody>
+      </p:sp>
+      <p:sp>
+        <p:nvSpPr>
+          <p:cNvPr id="24" name="Text 22"/>
+          <p:cNvSpPr txBox="1"/>
+          <p:nvPr/>
+        </p:nvSpPr>
+        <p:spPr>
+          <a:xfrm>
+            <a:off x="1417320" y="4754880"/>
+            <a:ext cx="10058400" cy="731520"/>
           </a:xfrm>
           <a:prstGeom prst="rect">
             <a:avLst/>
@@ -3730,62 +4668,23 @@
           <a:lstStyle/>
           <a:p>
             <a:pPr indent="0" marL="0">
-              <a:buNone/>
-            </a:pPr>
-            <a:r>
-              <a:rPr lang="en-US" sz="1600" b="1" dirty="0">
-                <a:solidFill>
-                  <a:srgbClr val="08A6A6"/>
+              <a:lnSpc>
+                <a:spcPct val="115000"/>
+              </a:lnSpc>
+              <a:buNone/>
+            </a:pPr>
+            <a:r>
+              <a:rPr lang="en-US" sz="1700" dirty="0">
+                <a:solidFill>
+                  <a:srgbClr val="101828"/>
                 </a:solidFill>
                 <a:latin typeface="IBM Plex Sans" pitchFamily="34" charset="0"/>
                 <a:ea typeface="IBM Plex Sans" pitchFamily="34" charset="-122"/>
                 <a:cs typeface="IBM Plex Sans" pitchFamily="34" charset="-120"/>
               </a:rPr>
-              <a:t>Off by one</a:t>
-            </a:r>
-            <a:endParaRPr lang="en-US" sz="1600" dirty="0"/>
-          </a:p>
-        </p:txBody>
-      </p:sp>
-      <p:sp>
-        <p:nvSpPr>
-          <p:cNvPr id="18" name="Text 16"/>
-          <p:cNvSpPr txBox="1"/>
-          <p:nvPr/>
-        </p:nvSpPr>
-        <p:spPr>
-          <a:xfrm>
-            <a:off x="6537960" y="4361688"/>
-            <a:ext cx="4754880" cy="1005840"/>
-          </a:xfrm>
-          <a:prstGeom prst="rect">
-            <a:avLst/>
-          </a:prstGeom>
-          <a:noFill/>
-          <a:ln/>
-        </p:spPr>
-        <p:txBody>
-          <a:bodyPr wrap="square" lIns="0" tIns="0" rIns="0" bIns="0" rtlCol="0" anchor="t"/>
-          <a:lstStyle/>
-          <a:p>
-            <a:pPr indent="0" marL="0">
-              <a:lnSpc>
-                <a:spcPct val="120000"/>
-              </a:lnSpc>
-              <a:buNone/>
-            </a:pPr>
-            <a:r>
-              <a:rPr lang="en-US" sz="1300" dirty="0">
-                <a:solidFill>
-                  <a:srgbClr val="667085"/>
-                </a:solidFill>
-                <a:latin typeface="IBM Plex Sans" pitchFamily="34" charset="0"/>
-                <a:ea typeface="IBM Plex Sans" pitchFamily="34" charset="-122"/>
-                <a:cs typeface="IBM Plex Sans" pitchFamily="34" charset="-120"/>
-              </a:rPr>
-              <a:t>The commonest loop bug in the world is running one time too many or too few. Count the repeats by hand when checking.</a:t>
-            </a:r>
-            <a:endParaRPr lang="en-US" sz="1300" dirty="0"/>
+              <a:t>Five</a:t>
+            </a:r>
+            <a:endParaRPr lang="en-US" sz="1700" dirty="0"/>
           </a:p>
         </p:txBody>
       </p:sp>
@@ -3921,14 +4820,75 @@
       </p:sp>
       <p:sp>
         <p:nvSpPr>
-          <p:cNvPr id="5" name="Text 3"/>
-          <p:cNvSpPr txBox="1"/>
-          <p:nvPr/>
-        </p:nvSpPr>
-        <p:spPr>
-          <a:xfrm>
-            <a:off x="502920" y="411480"/>
-            <a:ext cx="11155680" cy="777240"/>
+          <p:cNvPr id="5" name="Shape 3"/>
+          <p:cNvSpPr/>
+          <p:nvPr/>
+        </p:nvSpPr>
+        <p:spPr>
+          <a:xfrm>
+            <a:off x="502920" y="438912"/>
+            <a:ext cx="3108960" cy="502920"/>
+          </a:xfrm>
+          <a:prstGeom prst="roundRect">
+            <a:avLst>
+              <a:gd name="adj" fmla="val 18182"/>
+            </a:avLst>
+          </a:prstGeom>
+          <a:solidFill>
+            <a:srgbClr val="F4B942"/>
+          </a:solidFill>
+          <a:ln/>
+        </p:spPr>
+      </p:sp>
+      <p:sp>
+        <p:nvSpPr>
+          <p:cNvPr id="6" name="Text 4"/>
+          <p:cNvSpPr txBox="1"/>
+          <p:nvPr/>
+        </p:nvSpPr>
+        <p:spPr>
+          <a:xfrm>
+            <a:off x="502920" y="438912"/>
+            <a:ext cx="3108960" cy="502920"/>
+          </a:xfrm>
+          <a:prstGeom prst="rect">
+            <a:avLst/>
+          </a:prstGeom>
+          <a:noFill/>
+          <a:ln/>
+        </p:spPr>
+        <p:txBody>
+          <a:bodyPr wrap="square" lIns="0" tIns="0" rIns="0" bIns="0" rtlCol="0" anchor="ctr"/>
+          <a:lstStyle/>
+          <a:p>
+            <a:pPr algn="ctr" indent="0" marL="0">
+              <a:buNone/>
+            </a:pPr>
+            <a:r>
+              <a:rPr lang="en-US" sz="1300" b="1" dirty="0">
+                <a:solidFill>
+                  <a:srgbClr val="101828"/>
+                </a:solidFill>
+                <a:latin typeface="IBM Plex Mono" pitchFamily="34" charset="0"/>
+                <a:ea typeface="IBM Plex Mono" pitchFamily="34" charset="-122"/>
+                <a:cs typeface="IBM Plex Mono" pitchFamily="34" charset="-120"/>
+              </a:rPr>
+              <a:t>★  FINAL CHALLENGE</a:t>
+            </a:r>
+            <a:endParaRPr lang="en-US" sz="1300" dirty="0"/>
+          </a:p>
+        </p:txBody>
+      </p:sp>
+      <p:sp>
+        <p:nvSpPr>
+          <p:cNvPr id="7" name="Text 5"/>
+          <p:cNvSpPr txBox="1"/>
+          <p:nvPr/>
+        </p:nvSpPr>
+        <p:spPr>
+          <a:xfrm>
+            <a:off x="502920" y="1097280"/>
+            <a:ext cx="11155680" cy="731520"/>
           </a:xfrm>
           <a:prstGeom prst="rect">
             <a:avLst/>
@@ -3944,7 +4904,7 @@
               <a:buNone/>
             </a:pPr>
             <a:r>
-              <a:rPr lang="en-US" sz="3200" b="1" dirty="0">
+              <a:rPr lang="en-US" sz="3400" b="1" dirty="0">
                 <a:solidFill>
                   <a:srgbClr val="101828"/>
                 </a:solidFill>
@@ -3952,65 +4912,26 @@
                 <a:ea typeface="IBM Plex Sans" pitchFamily="34" charset="-122"/>
                 <a:cs typeface="IBM Plex Sans" pitchFamily="34" charset="-120"/>
               </a:rPr>
-              <a:t>Exam practice</a:t>
-            </a:r>
-            <a:endParaRPr lang="en-US" sz="3200" dirty="0"/>
-          </a:p>
-        </p:txBody>
-      </p:sp>
-      <p:sp>
-        <p:nvSpPr>
-          <p:cNvPr id="6" name="Text 4"/>
-          <p:cNvSpPr txBox="1"/>
-          <p:nvPr/>
-        </p:nvSpPr>
-        <p:spPr>
-          <a:xfrm>
-            <a:off x="502920" y="1170432"/>
-            <a:ext cx="11155680" cy="411480"/>
-          </a:xfrm>
-          <a:prstGeom prst="rect">
-            <a:avLst/>
-          </a:prstGeom>
-          <a:noFill/>
-          <a:ln/>
-        </p:spPr>
-        <p:txBody>
-          <a:bodyPr wrap="square" lIns="0" tIns="0" rIns="0" bIns="0" rtlCol="0" anchor="ctr"/>
-          <a:lstStyle/>
-          <a:p>
-            <a:pPr indent="0" marL="0">
-              <a:buNone/>
-            </a:pPr>
-            <a:r>
-              <a:rPr lang="en-US" sz="1500" dirty="0">
-                <a:solidFill>
-                  <a:srgbClr val="667085"/>
-                </a:solidFill>
-                <a:latin typeface="IBM Plex Sans" pitchFamily="34" charset="0"/>
-                <a:ea typeface="IBM Plex Sans" pitchFamily="34" charset="-122"/>
-                <a:cs typeface="IBM Plex Sans" pitchFamily="34" charset="-120"/>
-              </a:rPr>
-              <a:t>Devices away. Answer from memory on the worksheet.</a:t>
-            </a:r>
-            <a:endParaRPr lang="en-US" sz="1500" dirty="0"/>
-          </a:p>
-        </p:txBody>
-      </p:sp>
-      <p:sp>
-        <p:nvSpPr>
-          <p:cNvPr id="7" name="Shape 5"/>
+              <a:t>Read the code</a:t>
+            </a:r>
+            <a:endParaRPr lang="en-US" sz="3400" dirty="0"/>
+          </a:p>
+        </p:txBody>
+      </p:sp>
+      <p:sp>
+        <p:nvSpPr>
+          <p:cNvPr id="8" name="Shape 6"/>
           <p:cNvSpPr/>
           <p:nvPr/>
         </p:nvSpPr>
         <p:spPr>
           <a:xfrm>
-            <a:off x="502920" y="1828800"/>
-            <a:ext cx="11155680" cy="1097280"/>
+            <a:off x="502920" y="2011680"/>
+            <a:ext cx="11155680" cy="2194560"/>
           </a:xfrm>
           <a:prstGeom prst="roundRect">
             <a:avLst>
-              <a:gd name="adj" fmla="val 10000"/>
+              <a:gd name="adj" fmla="val 5000"/>
             </a:avLst>
           </a:prstGeom>
           <a:solidFill>
@@ -4018,7 +4939,7 @@
           </a:solidFill>
           <a:ln w="15875">
             <a:solidFill>
-              <a:srgbClr val="D9DEE7"/>
+              <a:srgbClr val="2D63FF"/>
             </a:solidFill>
             <a:prstDash val="solid"/>
           </a:ln>
@@ -4026,14 +4947,14 @@
       </p:sp>
       <p:sp>
         <p:nvSpPr>
-          <p:cNvPr id="8" name="Text 6"/>
-          <p:cNvSpPr txBox="1"/>
-          <p:nvPr/>
-        </p:nvSpPr>
-        <p:spPr>
-          <a:xfrm>
-            <a:off x="914400" y="1938528"/>
-            <a:ext cx="9418320" cy="877824"/>
+          <p:cNvPr id="9" name="Text 7"/>
+          <p:cNvSpPr txBox="1"/>
+          <p:nvPr/>
+        </p:nvSpPr>
+        <p:spPr>
+          <a:xfrm>
+            <a:off x="1005840" y="2331720"/>
+            <a:ext cx="10149840" cy="1554480"/>
           </a:xfrm>
           <a:prstGeom prst="rect">
             <a:avLst/>
@@ -4047,12 +4968,12 @@
           <a:p>
             <a:pPr indent="0" marL="0">
               <a:lnSpc>
-                <a:spcPct val="118000"/>
+                <a:spcPct val="130000"/>
               </a:lnSpc>
               <a:buNone/>
             </a:pPr>
             <a:r>
-              <a:rPr lang="en-US" sz="1700" dirty="0">
+              <a:rPr lang="en-US" sz="2200" dirty="0">
                 <a:solidFill>
                   <a:srgbClr val="101828"/>
                 </a:solidFill>
@@ -4060,33 +4981,11 @@
                 <a:ea typeface="IBM Plex Sans" pitchFamily="34" charset="-122"/>
                 <a:cs typeface="IBM Plex Sans" pitchFamily="34" charset="-120"/>
               </a:rPr>
-              <a:t>State what is meant by pseudocode.</a:t>
-            </a:r>
-            <a:endParaRPr lang="en-US" sz="1700" dirty="0"/>
-          </a:p>
-        </p:txBody>
-      </p:sp>
-      <p:sp>
-        <p:nvSpPr>
-          <p:cNvPr id="9" name="Shape 7"/>
-          <p:cNvSpPr/>
-          <p:nvPr/>
-        </p:nvSpPr>
-        <p:spPr>
-          <a:xfrm>
-            <a:off x="10515600" y="2130552"/>
-            <a:ext cx="868680" cy="493776"/>
-          </a:xfrm>
-          <a:prstGeom prst="roundRect">
-            <a:avLst>
-              <a:gd name="adj" fmla="val 18519"/>
-            </a:avLst>
-          </a:prstGeom>
-          <a:solidFill>
-            <a:srgbClr val="EEF2FB"/>
-          </a:solidFill>
-          <a:ln/>
-        </p:spPr>
+              <a:t>Three short programs in the reference language. Tap the star and work out what each one does.</a:t>
+            </a:r>
+            <a:endParaRPr lang="en-US" sz="2200" dirty="0"/>
+          </a:p>
+        </p:txBody>
       </p:sp>
       <p:sp>
         <p:nvSpPr>
@@ -4096,74 +4995,8 @@
         </p:nvSpPr>
         <p:spPr>
           <a:xfrm>
-            <a:off x="10515600" y="2130552"/>
-            <a:ext cx="868680" cy="493776"/>
-          </a:xfrm>
-          <a:prstGeom prst="rect">
-            <a:avLst/>
-          </a:prstGeom>
-          <a:noFill/>
-          <a:ln/>
-        </p:spPr>
-        <p:txBody>
-          <a:bodyPr wrap="square" lIns="0" tIns="0" rIns="0" bIns="0" rtlCol="0" anchor="ctr"/>
-          <a:lstStyle/>
-          <a:p>
-            <a:pPr algn="ctr" indent="0" marL="0">
-              <a:buNone/>
-            </a:pPr>
-            <a:r>
-              <a:rPr lang="en-US" sz="1500" b="1" dirty="0">
-                <a:solidFill>
-                  <a:srgbClr val="2D63FF"/>
-                </a:solidFill>
-                <a:latin typeface="IBM Plex Mono" pitchFamily="34" charset="0"/>
-                <a:ea typeface="IBM Plex Mono" pitchFamily="34" charset="-122"/>
-                <a:cs typeface="IBM Plex Mono" pitchFamily="34" charset="-120"/>
-              </a:rPr>
-              <a:t>[2]</a:t>
-            </a:r>
-            <a:endParaRPr lang="en-US" sz="1500" dirty="0"/>
-          </a:p>
-        </p:txBody>
-      </p:sp>
-      <p:sp>
-        <p:nvSpPr>
-          <p:cNvPr id="11" name="Shape 9"/>
-          <p:cNvSpPr/>
-          <p:nvPr/>
-        </p:nvSpPr>
-        <p:spPr>
-          <a:xfrm>
-            <a:off x="502920" y="3127248"/>
-            <a:ext cx="11155680" cy="1097280"/>
-          </a:xfrm>
-          <a:prstGeom prst="roundRect">
-            <a:avLst>
-              <a:gd name="adj" fmla="val 10000"/>
-            </a:avLst>
-          </a:prstGeom>
-          <a:solidFill>
-            <a:srgbClr val="FFFFFF"/>
-          </a:solidFill>
-          <a:ln w="15875">
-            <a:solidFill>
-              <a:srgbClr val="D9DEE7"/>
-            </a:solidFill>
-            <a:prstDash val="solid"/>
-          </a:ln>
-        </p:spPr>
-      </p:sp>
-      <p:sp>
-        <p:nvSpPr>
-          <p:cNvPr id="12" name="Text 10"/>
-          <p:cNvSpPr txBox="1"/>
-          <p:nvPr/>
-        </p:nvSpPr>
-        <p:spPr>
-          <a:xfrm>
-            <a:off x="914400" y="3236976"/>
-            <a:ext cx="9418320" cy="877824"/>
+            <a:off x="502920" y="4526280"/>
+            <a:ext cx="11155680" cy="457200"/>
           </a:xfrm>
           <a:prstGeom prst="rect">
             <a:avLst/>
@@ -4176,214 +5009,20 @@
           <a:lstStyle/>
           <a:p>
             <a:pPr indent="0" marL="0">
-              <a:lnSpc>
-                <a:spcPct val="118000"/>
-              </a:lnSpc>
-              <a:buNone/>
-            </a:pPr>
-            <a:r>
-              <a:rPr lang="en-US" sz="1700" dirty="0">
-                <a:solidFill>
-                  <a:srgbClr val="101828"/>
+              <a:buNone/>
+            </a:pPr>
+            <a:r>
+              <a:rPr lang="en-US" sz="1600" dirty="0">
+                <a:solidFill>
+                  <a:srgbClr val="667085"/>
                 </a:solidFill>
                 <a:latin typeface="IBM Plex Sans" pitchFamily="34" charset="0"/>
                 <a:ea typeface="IBM Plex Sans" pitchFamily="34" charset="-122"/>
                 <a:cs typeface="IBM Plex Sans" pitchFamily="34" charset="-120"/>
               </a:rPr>
-              <a:t>Explain the difference between a for loop and a while loop.</a:t>
-            </a:r>
-            <a:endParaRPr lang="en-US" sz="1700" dirty="0"/>
-          </a:p>
-        </p:txBody>
-      </p:sp>
-      <p:sp>
-        <p:nvSpPr>
-          <p:cNvPr id="13" name="Shape 11"/>
-          <p:cNvSpPr/>
-          <p:nvPr/>
-        </p:nvSpPr>
-        <p:spPr>
-          <a:xfrm>
-            <a:off x="10515600" y="3429000"/>
-            <a:ext cx="868680" cy="493776"/>
-          </a:xfrm>
-          <a:prstGeom prst="roundRect">
-            <a:avLst>
-              <a:gd name="adj" fmla="val 18519"/>
-            </a:avLst>
-          </a:prstGeom>
-          <a:solidFill>
-            <a:srgbClr val="EEF2FB"/>
-          </a:solidFill>
-          <a:ln/>
-        </p:spPr>
-      </p:sp>
-      <p:sp>
-        <p:nvSpPr>
-          <p:cNvPr id="14" name="Text 12"/>
-          <p:cNvSpPr txBox="1"/>
-          <p:nvPr/>
-        </p:nvSpPr>
-        <p:spPr>
-          <a:xfrm>
-            <a:off x="10515600" y="3429000"/>
-            <a:ext cx="868680" cy="493776"/>
-          </a:xfrm>
-          <a:prstGeom prst="rect">
-            <a:avLst/>
-          </a:prstGeom>
-          <a:noFill/>
-          <a:ln/>
-        </p:spPr>
-        <p:txBody>
-          <a:bodyPr wrap="square" lIns="0" tIns="0" rIns="0" bIns="0" rtlCol="0" anchor="ctr"/>
-          <a:lstStyle/>
-          <a:p>
-            <a:pPr algn="ctr" indent="0" marL="0">
-              <a:buNone/>
-            </a:pPr>
-            <a:r>
-              <a:rPr lang="en-US" sz="1500" b="1" dirty="0">
-                <a:solidFill>
-                  <a:srgbClr val="2D63FF"/>
-                </a:solidFill>
-                <a:latin typeface="IBM Plex Mono" pitchFamily="34" charset="0"/>
-                <a:ea typeface="IBM Plex Mono" pitchFamily="34" charset="-122"/>
-                <a:cs typeface="IBM Plex Mono" pitchFamily="34" charset="-120"/>
-              </a:rPr>
-              <a:t>[3]</a:t>
-            </a:r>
-            <a:endParaRPr lang="en-US" sz="1500" dirty="0"/>
-          </a:p>
-        </p:txBody>
-      </p:sp>
-      <p:sp>
-        <p:nvSpPr>
-          <p:cNvPr id="15" name="Shape 13"/>
-          <p:cNvSpPr/>
-          <p:nvPr/>
-        </p:nvSpPr>
-        <p:spPr>
-          <a:xfrm>
-            <a:off x="502920" y="4425696"/>
-            <a:ext cx="11155680" cy="1097280"/>
-          </a:xfrm>
-          <a:prstGeom prst="roundRect">
-            <a:avLst>
-              <a:gd name="adj" fmla="val 10000"/>
-            </a:avLst>
-          </a:prstGeom>
-          <a:solidFill>
-            <a:srgbClr val="FFFFFF"/>
-          </a:solidFill>
-          <a:ln w="15875">
-            <a:solidFill>
-              <a:srgbClr val="D9DEE7"/>
-            </a:solidFill>
-            <a:prstDash val="solid"/>
-          </a:ln>
-        </p:spPr>
-      </p:sp>
-      <p:sp>
-        <p:nvSpPr>
-          <p:cNvPr id="16" name="Text 14"/>
-          <p:cNvSpPr txBox="1"/>
-          <p:nvPr/>
-        </p:nvSpPr>
-        <p:spPr>
-          <a:xfrm>
-            <a:off x="914400" y="4535424"/>
-            <a:ext cx="9418320" cy="877824"/>
-          </a:xfrm>
-          <a:prstGeom prst="rect">
-            <a:avLst/>
-          </a:prstGeom>
-          <a:noFill/>
-          <a:ln/>
-        </p:spPr>
-        <p:txBody>
-          <a:bodyPr wrap="square" lIns="0" tIns="0" rIns="0" bIns="0" rtlCol="0" anchor="ctr"/>
-          <a:lstStyle/>
-          <a:p>
-            <a:pPr indent="0" marL="0">
-              <a:lnSpc>
-                <a:spcPct val="118000"/>
-              </a:lnSpc>
-              <a:buNone/>
-            </a:pPr>
-            <a:r>
-              <a:rPr lang="en-US" sz="1700" dirty="0">
-                <a:solidFill>
-                  <a:srgbClr val="101828"/>
-                </a:solidFill>
-                <a:latin typeface="IBM Plex Sans" pitchFamily="34" charset="0"/>
-                <a:ea typeface="IBM Plex Sans" pitchFamily="34" charset="-122"/>
-                <a:cs typeface="IBM Plex Sans" pitchFamily="34" charset="-120"/>
-              </a:rPr>
-              <a:t>Write an algorithm, using pseudocode, that inputs ten numbers and outputs the largest.</a:t>
-            </a:r>
-            <a:endParaRPr lang="en-US" sz="1700" dirty="0"/>
-          </a:p>
-        </p:txBody>
-      </p:sp>
-      <p:sp>
-        <p:nvSpPr>
-          <p:cNvPr id="17" name="Shape 15"/>
-          <p:cNvSpPr/>
-          <p:nvPr/>
-        </p:nvSpPr>
-        <p:spPr>
-          <a:xfrm>
-            <a:off x="10515600" y="4727448"/>
-            <a:ext cx="868680" cy="493776"/>
-          </a:xfrm>
-          <a:prstGeom prst="roundRect">
-            <a:avLst>
-              <a:gd name="adj" fmla="val 18519"/>
-            </a:avLst>
-          </a:prstGeom>
-          <a:solidFill>
-            <a:srgbClr val="EEF2FB"/>
-          </a:solidFill>
-          <a:ln/>
-        </p:spPr>
-      </p:sp>
-      <p:sp>
-        <p:nvSpPr>
-          <p:cNvPr id="18" name="Text 16"/>
-          <p:cNvSpPr txBox="1"/>
-          <p:nvPr/>
-        </p:nvSpPr>
-        <p:spPr>
-          <a:xfrm>
-            <a:off x="10515600" y="4727448"/>
-            <a:ext cx="868680" cy="493776"/>
-          </a:xfrm>
-          <a:prstGeom prst="rect">
-            <a:avLst/>
-          </a:prstGeom>
-          <a:noFill/>
-          <a:ln/>
-        </p:spPr>
-        <p:txBody>
-          <a:bodyPr wrap="square" lIns="0" tIns="0" rIns="0" bIns="0" rtlCol="0" anchor="ctr"/>
-          <a:lstStyle/>
-          <a:p>
-            <a:pPr algn="ctr" indent="0" marL="0">
-              <a:buNone/>
-            </a:pPr>
-            <a:r>
-              <a:rPr lang="en-US" sz="1500" b="1" dirty="0">
-                <a:solidFill>
-                  <a:srgbClr val="2D63FF"/>
-                </a:solidFill>
-                <a:latin typeface="IBM Plex Mono" pitchFamily="34" charset="0"/>
-                <a:ea typeface="IBM Plex Mono" pitchFamily="34" charset="-122"/>
-                <a:cs typeface="IBM Plex Mono" pitchFamily="34" charset="-120"/>
-              </a:rPr>
-              <a:t>[6]</a:t>
-            </a:r>
-            <a:endParaRPr lang="en-US" sz="1500" dirty="0"/>
+              <a:t>Predict on paper first, then look down and test it.</a:t>
+            </a:r>
+            <a:endParaRPr lang="en-US" sz="1600" dirty="0"/>
           </a:p>
         </p:txBody>
       </p:sp>
@@ -4398,6 +5037,1244 @@
 <file path=ppt/slides/slide14.xml><?xml version="1.0" encoding="utf-8"?>
 <p:sld xmlns:a="http://schemas.openxmlformats.org/drawingml/2006/main" xmlns:r="http://schemas.openxmlformats.org/officeDocument/2006/relationships" xmlns:p="http://schemas.openxmlformats.org/presentationml/2006/main">
   <p:cSld name="Slide 14">
+    <p:bg>
+      <p:bgPr>
+        <a:solidFill>
+          <a:srgbClr val="F7F7F4"/>
+        </a:solidFill>
+      </p:bgPr>
+    </p:bg>
+    <p:spTree>
+      <p:nvGrpSpPr>
+        <p:cNvPr id="1" name=""/>
+        <p:cNvGrpSpPr/>
+        <p:nvPr/>
+      </p:nvGrpSpPr>
+      <p:grpSpPr>
+        <a:xfrm>
+          <a:off x="0" y="0"/>
+          <a:ext cx="0" cy="0"/>
+          <a:chOff x="0" y="0"/>
+          <a:chExt cx="0" cy="0"/>
+        </a:xfrm>
+      </p:grpSpPr>
+      <p:sp>
+        <p:nvSpPr>
+          <p:cNvPr id="2" name="Shape 0"/>
+          <p:cNvSpPr/>
+          <p:nvPr/>
+        </p:nvSpPr>
+        <p:spPr>
+          <a:xfrm>
+            <a:off x="0" y="0"/>
+            <a:ext cx="12188952" cy="82296"/>
+          </a:xfrm>
+          <a:prstGeom prst="rect">
+            <a:avLst/>
+          </a:prstGeom>
+          <a:solidFill>
+            <a:srgbClr val="2D63FF"/>
+          </a:solidFill>
+          <a:ln/>
+        </p:spPr>
+      </p:sp>
+      <p:sp>
+        <p:nvSpPr>
+          <p:cNvPr id="3" name="Text 1"/>
+          <p:cNvSpPr txBox="1"/>
+          <p:nvPr/>
+        </p:nvSpPr>
+        <p:spPr>
+          <a:xfrm>
+            <a:off x="502920" y="6236208"/>
+            <a:ext cx="7772400" cy="365760"/>
+          </a:xfrm>
+          <a:prstGeom prst="rect">
+            <a:avLst/>
+          </a:prstGeom>
+          <a:noFill/>
+          <a:ln/>
+        </p:spPr>
+        <p:txBody>
+          <a:bodyPr wrap="square" lIns="0" tIns="0" rIns="0" bIns="0" rtlCol="0" anchor="ctr"/>
+          <a:lstStyle/>
+          <a:p>
+            <a:pPr indent="0" marL="0">
+              <a:buNone/>
+            </a:pPr>
+            <a:r>
+              <a:rPr lang="en-US" sz="1100" dirty="0">
+                <a:solidFill>
+                  <a:srgbClr val="667085"/>
+                </a:solidFill>
+                <a:latin typeface="IBM Plex Mono" pitchFamily="34" charset="0"/>
+                <a:ea typeface="IBM Plex Mono" pitchFamily="34" charset="-122"/>
+                <a:cs typeface="IBM Plex Mono" pitchFamily="34" charset="-120"/>
+              </a:rPr>
+              <a:t>2.1 Algorithms  |  Lesson 5</a:t>
+            </a:r>
+            <a:endParaRPr lang="en-US" sz="1100" dirty="0"/>
+          </a:p>
+        </p:txBody>
+      </p:sp>
+      <p:sp>
+        <p:nvSpPr>
+          <p:cNvPr id="4" name="Text 2"/>
+          <p:cNvSpPr txBox="1"/>
+          <p:nvPr/>
+        </p:nvSpPr>
+        <p:spPr>
+          <a:xfrm>
+            <a:off x="9326880" y="6236208"/>
+            <a:ext cx="2377440" cy="365760"/>
+          </a:xfrm>
+          <a:prstGeom prst="rect">
+            <a:avLst/>
+          </a:prstGeom>
+          <a:noFill/>
+          <a:ln/>
+        </p:spPr>
+        <p:txBody>
+          <a:bodyPr wrap="square" lIns="0" tIns="0" rIns="0" bIns="0" rtlCol="0" anchor="ctr"/>
+          <a:lstStyle/>
+          <a:p>
+            <a:pPr algn="r" indent="0" marL="0">
+              <a:buNone/>
+            </a:pPr>
+            <a:r>
+              <a:rPr lang="en-US" sz="1100" dirty="0">
+                <a:solidFill>
+                  <a:srgbClr val="667085"/>
+                </a:solidFill>
+                <a:latin typeface="IBM Plex Mono" pitchFamily="34" charset="0"/>
+                <a:ea typeface="IBM Plex Mono" pitchFamily="34" charset="-122"/>
+                <a:cs typeface="IBM Plex Mono" pitchFamily="34" charset="-120"/>
+              </a:rPr>
+              <a:t>Revise 360</a:t>
+            </a:r>
+            <a:endParaRPr lang="en-US" sz="1100" dirty="0"/>
+          </a:p>
+        </p:txBody>
+      </p:sp>
+      <p:sp>
+        <p:nvSpPr>
+          <p:cNvPr id="5" name="Text 3"/>
+          <p:cNvSpPr txBox="1"/>
+          <p:nvPr/>
+        </p:nvSpPr>
+        <p:spPr>
+          <a:xfrm>
+            <a:off x="502920" y="411480"/>
+            <a:ext cx="11155680" cy="777240"/>
+          </a:xfrm>
+          <a:prstGeom prst="rect">
+            <a:avLst/>
+          </a:prstGeom>
+          <a:noFill/>
+          <a:ln/>
+        </p:spPr>
+        <p:txBody>
+          <a:bodyPr wrap="square" lIns="0" tIns="0" rIns="0" bIns="0" rtlCol="0" anchor="ctr"/>
+          <a:lstStyle/>
+          <a:p>
+            <a:pPr indent="0" marL="0">
+              <a:buNone/>
+            </a:pPr>
+            <a:r>
+              <a:rPr lang="en-US" sz="3200" b="1" dirty="0">
+                <a:solidFill>
+                  <a:srgbClr val="101828"/>
+                </a:solidFill>
+                <a:latin typeface="IBM Plex Sans" pitchFamily="34" charset="0"/>
+                <a:ea typeface="IBM Plex Sans" pitchFamily="34" charset="-122"/>
+                <a:cs typeface="IBM Plex Sans" pitchFamily="34" charset="-120"/>
+              </a:rPr>
+              <a:t>Worth knowing</a:t>
+            </a:r>
+            <a:endParaRPr lang="en-US" sz="3200" dirty="0"/>
+          </a:p>
+        </p:txBody>
+      </p:sp>
+      <p:sp>
+        <p:nvSpPr>
+          <p:cNvPr id="6" name="Text 4"/>
+          <p:cNvSpPr txBox="1"/>
+          <p:nvPr/>
+        </p:nvSpPr>
+        <p:spPr>
+          <a:xfrm>
+            <a:off x="502920" y="1170432"/>
+            <a:ext cx="11155680" cy="411480"/>
+          </a:xfrm>
+          <a:prstGeom prst="rect">
+            <a:avLst/>
+          </a:prstGeom>
+          <a:noFill/>
+          <a:ln/>
+        </p:spPr>
+        <p:txBody>
+          <a:bodyPr wrap="square" lIns="0" tIns="0" rIns="0" bIns="0" rtlCol="0" anchor="ctr"/>
+          <a:lstStyle/>
+          <a:p>
+            <a:pPr indent="0" marL="0">
+              <a:buNone/>
+            </a:pPr>
+            <a:r>
+              <a:rPr lang="en-US" sz="1500" dirty="0">
+                <a:solidFill>
+                  <a:srgbClr val="667085"/>
+                </a:solidFill>
+                <a:latin typeface="IBM Plex Sans" pitchFamily="34" charset="0"/>
+                <a:ea typeface="IBM Plex Sans" pitchFamily="34" charset="-122"/>
+                <a:cs typeface="IBM Plex Sans" pitchFamily="34" charset="-120"/>
+              </a:rPr>
+              <a:t>The information markers dotted around the room</a:t>
+            </a:r>
+            <a:endParaRPr lang="en-US" sz="1500" dirty="0"/>
+          </a:p>
+        </p:txBody>
+      </p:sp>
+      <p:sp>
+        <p:nvSpPr>
+          <p:cNvPr id="7" name="Shape 5"/>
+          <p:cNvSpPr/>
+          <p:nvPr/>
+        </p:nvSpPr>
+        <p:spPr>
+          <a:xfrm>
+            <a:off x="502920" y="1828800"/>
+            <a:ext cx="5394960" cy="1737360"/>
+          </a:xfrm>
+          <a:prstGeom prst="roundRect">
+            <a:avLst>
+              <a:gd name="adj" fmla="val 6316"/>
+            </a:avLst>
+          </a:prstGeom>
+          <a:solidFill>
+            <a:srgbClr val="FFFFFF"/>
+          </a:solidFill>
+          <a:ln w="15875">
+            <a:solidFill>
+              <a:srgbClr val="2D63FF"/>
+            </a:solidFill>
+            <a:prstDash val="solid"/>
+          </a:ln>
+        </p:spPr>
+      </p:sp>
+      <p:sp>
+        <p:nvSpPr>
+          <p:cNvPr id="8" name="Text 6"/>
+          <p:cNvSpPr txBox="1"/>
+          <p:nvPr/>
+        </p:nvSpPr>
+        <p:spPr>
+          <a:xfrm>
+            <a:off x="822960" y="2011680"/>
+            <a:ext cx="4754880" cy="365760"/>
+          </a:xfrm>
+          <a:prstGeom prst="rect">
+            <a:avLst/>
+          </a:prstGeom>
+          <a:noFill/>
+          <a:ln/>
+        </p:spPr>
+        <p:txBody>
+          <a:bodyPr wrap="square" lIns="0" tIns="0" rIns="0" bIns="0" rtlCol="0" anchor="ctr"/>
+          <a:lstStyle/>
+          <a:p>
+            <a:pPr indent="0" marL="0">
+              <a:buNone/>
+            </a:pPr>
+            <a:r>
+              <a:rPr lang="en-US" sz="1600" b="1" dirty="0">
+                <a:solidFill>
+                  <a:srgbClr val="2D63FF"/>
+                </a:solidFill>
+                <a:latin typeface="IBM Plex Sans" pitchFamily="34" charset="0"/>
+                <a:ea typeface="IBM Plex Sans" pitchFamily="34" charset="-122"/>
+                <a:cs typeface="IBM Plex Sans" pitchFamily="34" charset="-120"/>
+              </a:rPr>
+              <a:t>No standard</a:t>
+            </a:r>
+            <a:endParaRPr lang="en-US" sz="1600" dirty="0"/>
+          </a:p>
+        </p:txBody>
+      </p:sp>
+      <p:sp>
+        <p:nvSpPr>
+          <p:cNvPr id="9" name="Text 7"/>
+          <p:cNvSpPr txBox="1"/>
+          <p:nvPr/>
+        </p:nvSpPr>
+        <p:spPr>
+          <a:xfrm>
+            <a:off x="822960" y="2395728"/>
+            <a:ext cx="4754880" cy="1005840"/>
+          </a:xfrm>
+          <a:prstGeom prst="rect">
+            <a:avLst/>
+          </a:prstGeom>
+          <a:noFill/>
+          <a:ln/>
+        </p:spPr>
+        <p:txBody>
+          <a:bodyPr wrap="square" lIns="0" tIns="0" rIns="0" bIns="0" rtlCol="0" anchor="t"/>
+          <a:lstStyle/>
+          <a:p>
+            <a:pPr indent="0" marL="0">
+              <a:lnSpc>
+                <a:spcPct val="120000"/>
+              </a:lnSpc>
+              <a:buNone/>
+            </a:pPr>
+            <a:r>
+              <a:rPr lang="en-US" sz="1300" dirty="0">
+                <a:solidFill>
+                  <a:srgbClr val="667085"/>
+                </a:solidFill>
+                <a:latin typeface="IBM Plex Sans" pitchFamily="34" charset="0"/>
+                <a:ea typeface="IBM Plex Sans" pitchFamily="34" charset="-122"/>
+                <a:cs typeface="IBM Plex Sans" pitchFamily="34" charset="-120"/>
+              </a:rPr>
+              <a:t>There is no official pseudocode. Every exam board and textbook has its own, which is why OCR publishes a reference guide.</a:t>
+            </a:r>
+            <a:endParaRPr lang="en-US" sz="1300" dirty="0"/>
+          </a:p>
+        </p:txBody>
+      </p:sp>
+      <p:sp>
+        <p:nvSpPr>
+          <p:cNvPr id="10" name="Shape 8"/>
+          <p:cNvSpPr/>
+          <p:nvPr/>
+        </p:nvSpPr>
+        <p:spPr>
+          <a:xfrm>
+            <a:off x="6217920" y="1828800"/>
+            <a:ext cx="5394960" cy="1737360"/>
+          </a:xfrm>
+          <a:prstGeom prst="roundRect">
+            <a:avLst>
+              <a:gd name="adj" fmla="val 6316"/>
+            </a:avLst>
+          </a:prstGeom>
+          <a:solidFill>
+            <a:srgbClr val="FFFFFF"/>
+          </a:solidFill>
+          <a:ln w="15875">
+            <a:solidFill>
+              <a:srgbClr val="08A6A6"/>
+            </a:solidFill>
+            <a:prstDash val="solid"/>
+          </a:ln>
+        </p:spPr>
+      </p:sp>
+      <p:sp>
+        <p:nvSpPr>
+          <p:cNvPr id="11" name="Text 9"/>
+          <p:cNvSpPr txBox="1"/>
+          <p:nvPr/>
+        </p:nvSpPr>
+        <p:spPr>
+          <a:xfrm>
+            <a:off x="6537960" y="2011680"/>
+            <a:ext cx="4754880" cy="365760"/>
+          </a:xfrm>
+          <a:prstGeom prst="rect">
+            <a:avLst/>
+          </a:prstGeom>
+          <a:noFill/>
+          <a:ln/>
+        </p:spPr>
+        <p:txBody>
+          <a:bodyPr wrap="square" lIns="0" tIns="0" rIns="0" bIns="0" rtlCol="0" anchor="ctr"/>
+          <a:lstStyle/>
+          <a:p>
+            <a:pPr indent="0" marL="0">
+              <a:buNone/>
+            </a:pPr>
+            <a:r>
+              <a:rPr lang="en-US" sz="1600" b="1" dirty="0">
+                <a:solidFill>
+                  <a:srgbClr val="08A6A6"/>
+                </a:solidFill>
+                <a:latin typeface="IBM Plex Sans" pitchFamily="34" charset="0"/>
+                <a:ea typeface="IBM Plex Sans" pitchFamily="34" charset="-122"/>
+                <a:cs typeface="IBM Plex Sans" pitchFamily="34" charset="-120"/>
+              </a:rPr>
+              <a:t>Close to Python</a:t>
+            </a:r>
+            <a:endParaRPr lang="en-US" sz="1600" dirty="0"/>
+          </a:p>
+        </p:txBody>
+      </p:sp>
+      <p:sp>
+        <p:nvSpPr>
+          <p:cNvPr id="12" name="Text 10"/>
+          <p:cNvSpPr txBox="1"/>
+          <p:nvPr/>
+        </p:nvSpPr>
+        <p:spPr>
+          <a:xfrm>
+            <a:off x="6537960" y="2395728"/>
+            <a:ext cx="4754880" cy="1005840"/>
+          </a:xfrm>
+          <a:prstGeom prst="rect">
+            <a:avLst/>
+          </a:prstGeom>
+          <a:noFill/>
+          <a:ln/>
+        </p:spPr>
+        <p:txBody>
+          <a:bodyPr wrap="square" lIns="0" tIns="0" rIns="0" bIns="0" rtlCol="0" anchor="t"/>
+          <a:lstStyle/>
+          <a:p>
+            <a:pPr indent="0" marL="0">
+              <a:lnSpc>
+                <a:spcPct val="120000"/>
+              </a:lnSpc>
+              <a:buNone/>
+            </a:pPr>
+            <a:r>
+              <a:rPr lang="en-US" sz="1300" dirty="0">
+                <a:solidFill>
+                  <a:srgbClr val="667085"/>
+                </a:solidFill>
+                <a:latin typeface="IBM Plex Sans" pitchFamily="34" charset="0"/>
+                <a:ea typeface="IBM Plex Sans" pitchFamily="34" charset="-122"/>
+                <a:cs typeface="IBM Plex Sans" pitchFamily="34" charset="-120"/>
+              </a:rPr>
+              <a:t>The reference language looks like Python on purpose, because so many schools teach Python, but the endif and next keywords are not Python.</a:t>
+            </a:r>
+            <a:endParaRPr lang="en-US" sz="1300" dirty="0"/>
+          </a:p>
+        </p:txBody>
+      </p:sp>
+      <p:sp>
+        <p:nvSpPr>
+          <p:cNvPr id="13" name="Shape 11"/>
+          <p:cNvSpPr/>
+          <p:nvPr/>
+        </p:nvSpPr>
+        <p:spPr>
+          <a:xfrm>
+            <a:off x="502920" y="3794760"/>
+            <a:ext cx="5394960" cy="1737360"/>
+          </a:xfrm>
+          <a:prstGeom prst="roundRect">
+            <a:avLst>
+              <a:gd name="adj" fmla="val 6316"/>
+            </a:avLst>
+          </a:prstGeom>
+          <a:solidFill>
+            <a:srgbClr val="FFFFFF"/>
+          </a:solidFill>
+          <a:ln w="15875">
+            <a:solidFill>
+              <a:srgbClr val="2D63FF"/>
+            </a:solidFill>
+            <a:prstDash val="solid"/>
+          </a:ln>
+        </p:spPr>
+      </p:sp>
+      <p:sp>
+        <p:nvSpPr>
+          <p:cNvPr id="14" name="Text 12"/>
+          <p:cNvSpPr txBox="1"/>
+          <p:nvPr/>
+        </p:nvSpPr>
+        <p:spPr>
+          <a:xfrm>
+            <a:off x="822960" y="3977640"/>
+            <a:ext cx="4754880" cy="365760"/>
+          </a:xfrm>
+          <a:prstGeom prst="rect">
+            <a:avLst/>
+          </a:prstGeom>
+          <a:noFill/>
+          <a:ln/>
+        </p:spPr>
+        <p:txBody>
+          <a:bodyPr wrap="square" lIns="0" tIns="0" rIns="0" bIns="0" rtlCol="0" anchor="ctr"/>
+          <a:lstStyle/>
+          <a:p>
+            <a:pPr indent="0" marL="0">
+              <a:buNone/>
+            </a:pPr>
+            <a:r>
+              <a:rPr lang="en-US" sz="1600" b="1" dirty="0">
+                <a:solidFill>
+                  <a:srgbClr val="2D63FF"/>
+                </a:solidFill>
+                <a:latin typeface="IBM Plex Sans" pitchFamily="34" charset="0"/>
+                <a:ea typeface="IBM Plex Sans" pitchFamily="34" charset="-122"/>
+                <a:cs typeface="IBM Plex Sans" pitchFamily="34" charset="-120"/>
+              </a:rPr>
+              <a:t>Zero indexing</a:t>
+            </a:r>
+            <a:endParaRPr lang="en-US" sz="1600" dirty="0"/>
+          </a:p>
+        </p:txBody>
+      </p:sp>
+      <p:sp>
+        <p:nvSpPr>
+          <p:cNvPr id="15" name="Text 13"/>
+          <p:cNvSpPr txBox="1"/>
+          <p:nvPr/>
+        </p:nvSpPr>
+        <p:spPr>
+          <a:xfrm>
+            <a:off x="822960" y="4361688"/>
+            <a:ext cx="4754880" cy="1005840"/>
+          </a:xfrm>
+          <a:prstGeom prst="rect">
+            <a:avLst/>
+          </a:prstGeom>
+          <a:noFill/>
+          <a:ln/>
+        </p:spPr>
+        <p:txBody>
+          <a:bodyPr wrap="square" lIns="0" tIns="0" rIns="0" bIns="0" rtlCol="0" anchor="t"/>
+          <a:lstStyle/>
+          <a:p>
+            <a:pPr indent="0" marL="0">
+              <a:lnSpc>
+                <a:spcPct val="120000"/>
+              </a:lnSpc>
+              <a:buNone/>
+            </a:pPr>
+            <a:r>
+              <a:rPr lang="en-US" sz="1300" dirty="0">
+                <a:solidFill>
+                  <a:srgbClr val="667085"/>
+                </a:solidFill>
+                <a:latin typeface="IBM Plex Sans" pitchFamily="34" charset="0"/>
+                <a:ea typeface="IBM Plex Sans" pitchFamily="34" charset="-122"/>
+                <a:cs typeface="IBM Plex Sans" pitchFamily="34" charset="-120"/>
+              </a:rPr>
+              <a:t>Arrays start at zero in most languages, a habit that comes from the arithmetic of memory addresses.</a:t>
+            </a:r>
+            <a:endParaRPr lang="en-US" sz="1300" dirty="0"/>
+          </a:p>
+        </p:txBody>
+      </p:sp>
+      <p:sp>
+        <p:nvSpPr>
+          <p:cNvPr id="16" name="Shape 14"/>
+          <p:cNvSpPr/>
+          <p:nvPr/>
+        </p:nvSpPr>
+        <p:spPr>
+          <a:xfrm>
+            <a:off x="6217920" y="3794760"/>
+            <a:ext cx="5394960" cy="1737360"/>
+          </a:xfrm>
+          <a:prstGeom prst="roundRect">
+            <a:avLst>
+              <a:gd name="adj" fmla="val 6316"/>
+            </a:avLst>
+          </a:prstGeom>
+          <a:solidFill>
+            <a:srgbClr val="FFFFFF"/>
+          </a:solidFill>
+          <a:ln w="15875">
+            <a:solidFill>
+              <a:srgbClr val="08A6A6"/>
+            </a:solidFill>
+            <a:prstDash val="solid"/>
+          </a:ln>
+        </p:spPr>
+      </p:sp>
+      <p:sp>
+        <p:nvSpPr>
+          <p:cNvPr id="17" name="Text 15"/>
+          <p:cNvSpPr txBox="1"/>
+          <p:nvPr/>
+        </p:nvSpPr>
+        <p:spPr>
+          <a:xfrm>
+            <a:off x="6537960" y="3977640"/>
+            <a:ext cx="4754880" cy="365760"/>
+          </a:xfrm>
+          <a:prstGeom prst="rect">
+            <a:avLst/>
+          </a:prstGeom>
+          <a:noFill/>
+          <a:ln/>
+        </p:spPr>
+        <p:txBody>
+          <a:bodyPr wrap="square" lIns="0" tIns="0" rIns="0" bIns="0" rtlCol="0" anchor="ctr"/>
+          <a:lstStyle/>
+          <a:p>
+            <a:pPr indent="0" marL="0">
+              <a:buNone/>
+            </a:pPr>
+            <a:r>
+              <a:rPr lang="en-US" sz="1600" b="1" dirty="0">
+                <a:solidFill>
+                  <a:srgbClr val="08A6A6"/>
+                </a:solidFill>
+                <a:latin typeface="IBM Plex Sans" pitchFamily="34" charset="0"/>
+                <a:ea typeface="IBM Plex Sans" pitchFamily="34" charset="-122"/>
+                <a:cs typeface="IBM Plex Sans" pitchFamily="34" charset="-120"/>
+              </a:rPr>
+              <a:t>Off by one</a:t>
+            </a:r>
+            <a:endParaRPr lang="en-US" sz="1600" dirty="0"/>
+          </a:p>
+        </p:txBody>
+      </p:sp>
+      <p:sp>
+        <p:nvSpPr>
+          <p:cNvPr id="18" name="Text 16"/>
+          <p:cNvSpPr txBox="1"/>
+          <p:nvPr/>
+        </p:nvSpPr>
+        <p:spPr>
+          <a:xfrm>
+            <a:off x="6537960" y="4361688"/>
+            <a:ext cx="4754880" cy="1005840"/>
+          </a:xfrm>
+          <a:prstGeom prst="rect">
+            <a:avLst/>
+          </a:prstGeom>
+          <a:noFill/>
+          <a:ln/>
+        </p:spPr>
+        <p:txBody>
+          <a:bodyPr wrap="square" lIns="0" tIns="0" rIns="0" bIns="0" rtlCol="0" anchor="t"/>
+          <a:lstStyle/>
+          <a:p>
+            <a:pPr indent="0" marL="0">
+              <a:lnSpc>
+                <a:spcPct val="120000"/>
+              </a:lnSpc>
+              <a:buNone/>
+            </a:pPr>
+            <a:r>
+              <a:rPr lang="en-US" sz="1300" dirty="0">
+                <a:solidFill>
+                  <a:srgbClr val="667085"/>
+                </a:solidFill>
+                <a:latin typeface="IBM Plex Sans" pitchFamily="34" charset="0"/>
+                <a:ea typeface="IBM Plex Sans" pitchFamily="34" charset="-122"/>
+                <a:cs typeface="IBM Plex Sans" pitchFamily="34" charset="-120"/>
+              </a:rPr>
+              <a:t>The commonest loop bug in the world is running one time too many or too few. Count the repeats by hand when checking.</a:t>
+            </a:r>
+            <a:endParaRPr lang="en-US" sz="1300" dirty="0"/>
+          </a:p>
+        </p:txBody>
+      </p:sp>
+    </p:spTree>
+  </p:cSld>
+  <p:clrMapOvr>
+    <a:masterClrMapping/>
+  </p:clrMapOvr>
+</p:sld>
+</file>
+
+<file path=ppt/slides/slide15.xml><?xml version="1.0" encoding="utf-8"?>
+<p:sld xmlns:a="http://schemas.openxmlformats.org/drawingml/2006/main" xmlns:r="http://schemas.openxmlformats.org/officeDocument/2006/relationships" xmlns:p="http://schemas.openxmlformats.org/presentationml/2006/main">
+  <p:cSld name="Slide 15">
+    <p:bg>
+      <p:bgPr>
+        <a:solidFill>
+          <a:srgbClr val="F7F7F4"/>
+        </a:solidFill>
+      </p:bgPr>
+    </p:bg>
+    <p:spTree>
+      <p:nvGrpSpPr>
+        <p:cNvPr id="1" name=""/>
+        <p:cNvGrpSpPr/>
+        <p:nvPr/>
+      </p:nvGrpSpPr>
+      <p:grpSpPr>
+        <a:xfrm>
+          <a:off x="0" y="0"/>
+          <a:ext cx="0" cy="0"/>
+          <a:chOff x="0" y="0"/>
+          <a:chExt cx="0" cy="0"/>
+        </a:xfrm>
+      </p:grpSpPr>
+      <p:sp>
+        <p:nvSpPr>
+          <p:cNvPr id="2" name="Shape 0"/>
+          <p:cNvSpPr/>
+          <p:nvPr/>
+        </p:nvSpPr>
+        <p:spPr>
+          <a:xfrm>
+            <a:off x="0" y="0"/>
+            <a:ext cx="12188952" cy="82296"/>
+          </a:xfrm>
+          <a:prstGeom prst="rect">
+            <a:avLst/>
+          </a:prstGeom>
+          <a:solidFill>
+            <a:srgbClr val="2D63FF"/>
+          </a:solidFill>
+          <a:ln/>
+        </p:spPr>
+      </p:sp>
+      <p:sp>
+        <p:nvSpPr>
+          <p:cNvPr id="3" name="Text 1"/>
+          <p:cNvSpPr txBox="1"/>
+          <p:nvPr/>
+        </p:nvSpPr>
+        <p:spPr>
+          <a:xfrm>
+            <a:off x="502920" y="6236208"/>
+            <a:ext cx="7772400" cy="365760"/>
+          </a:xfrm>
+          <a:prstGeom prst="rect">
+            <a:avLst/>
+          </a:prstGeom>
+          <a:noFill/>
+          <a:ln/>
+        </p:spPr>
+        <p:txBody>
+          <a:bodyPr wrap="square" lIns="0" tIns="0" rIns="0" bIns="0" rtlCol="0" anchor="ctr"/>
+          <a:lstStyle/>
+          <a:p>
+            <a:pPr indent="0" marL="0">
+              <a:buNone/>
+            </a:pPr>
+            <a:r>
+              <a:rPr lang="en-US" sz="1100" dirty="0">
+                <a:solidFill>
+                  <a:srgbClr val="667085"/>
+                </a:solidFill>
+                <a:latin typeface="IBM Plex Mono" pitchFamily="34" charset="0"/>
+                <a:ea typeface="IBM Plex Mono" pitchFamily="34" charset="-122"/>
+                <a:cs typeface="IBM Plex Mono" pitchFamily="34" charset="-120"/>
+              </a:rPr>
+              <a:t>2.1 Algorithms  |  Lesson 5</a:t>
+            </a:r>
+            <a:endParaRPr lang="en-US" sz="1100" dirty="0"/>
+          </a:p>
+        </p:txBody>
+      </p:sp>
+      <p:sp>
+        <p:nvSpPr>
+          <p:cNvPr id="4" name="Text 2"/>
+          <p:cNvSpPr txBox="1"/>
+          <p:nvPr/>
+        </p:nvSpPr>
+        <p:spPr>
+          <a:xfrm>
+            <a:off x="9326880" y="6236208"/>
+            <a:ext cx="2377440" cy="365760"/>
+          </a:xfrm>
+          <a:prstGeom prst="rect">
+            <a:avLst/>
+          </a:prstGeom>
+          <a:noFill/>
+          <a:ln/>
+        </p:spPr>
+        <p:txBody>
+          <a:bodyPr wrap="square" lIns="0" tIns="0" rIns="0" bIns="0" rtlCol="0" anchor="ctr"/>
+          <a:lstStyle/>
+          <a:p>
+            <a:pPr algn="r" indent="0" marL="0">
+              <a:buNone/>
+            </a:pPr>
+            <a:r>
+              <a:rPr lang="en-US" sz="1100" dirty="0">
+                <a:solidFill>
+                  <a:srgbClr val="667085"/>
+                </a:solidFill>
+                <a:latin typeface="IBM Plex Mono" pitchFamily="34" charset="0"/>
+                <a:ea typeface="IBM Plex Mono" pitchFamily="34" charset="-122"/>
+                <a:cs typeface="IBM Plex Mono" pitchFamily="34" charset="-120"/>
+              </a:rPr>
+              <a:t>Revise 360</a:t>
+            </a:r>
+            <a:endParaRPr lang="en-US" sz="1100" dirty="0"/>
+          </a:p>
+        </p:txBody>
+      </p:sp>
+      <p:sp>
+        <p:nvSpPr>
+          <p:cNvPr id="5" name="Text 3"/>
+          <p:cNvSpPr txBox="1"/>
+          <p:nvPr/>
+        </p:nvSpPr>
+        <p:spPr>
+          <a:xfrm>
+            <a:off x="502920" y="411480"/>
+            <a:ext cx="11155680" cy="777240"/>
+          </a:xfrm>
+          <a:prstGeom prst="rect">
+            <a:avLst/>
+          </a:prstGeom>
+          <a:noFill/>
+          <a:ln/>
+        </p:spPr>
+        <p:txBody>
+          <a:bodyPr wrap="square" lIns="0" tIns="0" rIns="0" bIns="0" rtlCol="0" anchor="ctr"/>
+          <a:lstStyle/>
+          <a:p>
+            <a:pPr indent="0" marL="0">
+              <a:buNone/>
+            </a:pPr>
+            <a:r>
+              <a:rPr lang="en-US" sz="3200" b="1" dirty="0">
+                <a:solidFill>
+                  <a:srgbClr val="101828"/>
+                </a:solidFill>
+                <a:latin typeface="IBM Plex Sans" pitchFamily="34" charset="0"/>
+                <a:ea typeface="IBM Plex Sans" pitchFamily="34" charset="-122"/>
+                <a:cs typeface="IBM Plex Sans" pitchFamily="34" charset="-120"/>
+              </a:rPr>
+              <a:t>Exam practice</a:t>
+            </a:r>
+            <a:endParaRPr lang="en-US" sz="3200" dirty="0"/>
+          </a:p>
+        </p:txBody>
+      </p:sp>
+      <p:sp>
+        <p:nvSpPr>
+          <p:cNvPr id="6" name="Text 4"/>
+          <p:cNvSpPr txBox="1"/>
+          <p:nvPr/>
+        </p:nvSpPr>
+        <p:spPr>
+          <a:xfrm>
+            <a:off x="502920" y="1170432"/>
+            <a:ext cx="11155680" cy="411480"/>
+          </a:xfrm>
+          <a:prstGeom prst="rect">
+            <a:avLst/>
+          </a:prstGeom>
+          <a:noFill/>
+          <a:ln/>
+        </p:spPr>
+        <p:txBody>
+          <a:bodyPr wrap="square" lIns="0" tIns="0" rIns="0" bIns="0" rtlCol="0" anchor="ctr"/>
+          <a:lstStyle/>
+          <a:p>
+            <a:pPr indent="0" marL="0">
+              <a:buNone/>
+            </a:pPr>
+            <a:r>
+              <a:rPr lang="en-US" sz="1500" dirty="0">
+                <a:solidFill>
+                  <a:srgbClr val="667085"/>
+                </a:solidFill>
+                <a:latin typeface="IBM Plex Sans" pitchFamily="34" charset="0"/>
+                <a:ea typeface="IBM Plex Sans" pitchFamily="34" charset="-122"/>
+                <a:cs typeface="IBM Plex Sans" pitchFamily="34" charset="-120"/>
+              </a:rPr>
+              <a:t>Devices away. Answer from memory on the worksheet.</a:t>
+            </a:r>
+            <a:endParaRPr lang="en-US" sz="1500" dirty="0"/>
+          </a:p>
+        </p:txBody>
+      </p:sp>
+      <p:sp>
+        <p:nvSpPr>
+          <p:cNvPr id="7" name="Shape 5"/>
+          <p:cNvSpPr/>
+          <p:nvPr/>
+        </p:nvSpPr>
+        <p:spPr>
+          <a:xfrm>
+            <a:off x="502920" y="1828800"/>
+            <a:ext cx="11155680" cy="1097280"/>
+          </a:xfrm>
+          <a:prstGeom prst="roundRect">
+            <a:avLst>
+              <a:gd name="adj" fmla="val 10000"/>
+            </a:avLst>
+          </a:prstGeom>
+          <a:solidFill>
+            <a:srgbClr val="FFFFFF"/>
+          </a:solidFill>
+          <a:ln w="15875">
+            <a:solidFill>
+              <a:srgbClr val="D9DEE7"/>
+            </a:solidFill>
+            <a:prstDash val="solid"/>
+          </a:ln>
+        </p:spPr>
+      </p:sp>
+      <p:sp>
+        <p:nvSpPr>
+          <p:cNvPr id="8" name="Text 6"/>
+          <p:cNvSpPr txBox="1"/>
+          <p:nvPr/>
+        </p:nvSpPr>
+        <p:spPr>
+          <a:xfrm>
+            <a:off x="914400" y="1938528"/>
+            <a:ext cx="9418320" cy="877824"/>
+          </a:xfrm>
+          <a:prstGeom prst="rect">
+            <a:avLst/>
+          </a:prstGeom>
+          <a:noFill/>
+          <a:ln/>
+        </p:spPr>
+        <p:txBody>
+          <a:bodyPr wrap="square" lIns="0" tIns="0" rIns="0" bIns="0" rtlCol="0" anchor="ctr"/>
+          <a:lstStyle/>
+          <a:p>
+            <a:pPr indent="0" marL="0">
+              <a:lnSpc>
+                <a:spcPct val="118000"/>
+              </a:lnSpc>
+              <a:buNone/>
+            </a:pPr>
+            <a:r>
+              <a:rPr lang="en-US" sz="1700" dirty="0">
+                <a:solidFill>
+                  <a:srgbClr val="101828"/>
+                </a:solidFill>
+                <a:latin typeface="IBM Plex Sans" pitchFamily="34" charset="0"/>
+                <a:ea typeface="IBM Plex Sans" pitchFamily="34" charset="-122"/>
+                <a:cs typeface="IBM Plex Sans" pitchFamily="34" charset="-120"/>
+              </a:rPr>
+              <a:t>State what is meant by pseudocode.</a:t>
+            </a:r>
+            <a:endParaRPr lang="en-US" sz="1700" dirty="0"/>
+          </a:p>
+        </p:txBody>
+      </p:sp>
+      <p:sp>
+        <p:nvSpPr>
+          <p:cNvPr id="9" name="Shape 7"/>
+          <p:cNvSpPr/>
+          <p:nvPr/>
+        </p:nvSpPr>
+        <p:spPr>
+          <a:xfrm>
+            <a:off x="10515600" y="2130552"/>
+            <a:ext cx="868680" cy="493776"/>
+          </a:xfrm>
+          <a:prstGeom prst="roundRect">
+            <a:avLst>
+              <a:gd name="adj" fmla="val 18519"/>
+            </a:avLst>
+          </a:prstGeom>
+          <a:solidFill>
+            <a:srgbClr val="EEF2FB"/>
+          </a:solidFill>
+          <a:ln/>
+        </p:spPr>
+      </p:sp>
+      <p:sp>
+        <p:nvSpPr>
+          <p:cNvPr id="10" name="Text 8"/>
+          <p:cNvSpPr txBox="1"/>
+          <p:nvPr/>
+        </p:nvSpPr>
+        <p:spPr>
+          <a:xfrm>
+            <a:off x="10515600" y="2130552"/>
+            <a:ext cx="868680" cy="493776"/>
+          </a:xfrm>
+          <a:prstGeom prst="rect">
+            <a:avLst/>
+          </a:prstGeom>
+          <a:noFill/>
+          <a:ln/>
+        </p:spPr>
+        <p:txBody>
+          <a:bodyPr wrap="square" lIns="0" tIns="0" rIns="0" bIns="0" rtlCol="0" anchor="ctr"/>
+          <a:lstStyle/>
+          <a:p>
+            <a:pPr algn="ctr" indent="0" marL="0">
+              <a:buNone/>
+            </a:pPr>
+            <a:r>
+              <a:rPr lang="en-US" sz="1500" b="1" dirty="0">
+                <a:solidFill>
+                  <a:srgbClr val="2D63FF"/>
+                </a:solidFill>
+                <a:latin typeface="IBM Plex Mono" pitchFamily="34" charset="0"/>
+                <a:ea typeface="IBM Plex Mono" pitchFamily="34" charset="-122"/>
+                <a:cs typeface="IBM Plex Mono" pitchFamily="34" charset="-120"/>
+              </a:rPr>
+              <a:t>[2]</a:t>
+            </a:r>
+            <a:endParaRPr lang="en-US" sz="1500" dirty="0"/>
+          </a:p>
+        </p:txBody>
+      </p:sp>
+      <p:sp>
+        <p:nvSpPr>
+          <p:cNvPr id="11" name="Shape 9"/>
+          <p:cNvSpPr/>
+          <p:nvPr/>
+        </p:nvSpPr>
+        <p:spPr>
+          <a:xfrm>
+            <a:off x="502920" y="3127248"/>
+            <a:ext cx="11155680" cy="1097280"/>
+          </a:xfrm>
+          <a:prstGeom prst="roundRect">
+            <a:avLst>
+              <a:gd name="adj" fmla="val 10000"/>
+            </a:avLst>
+          </a:prstGeom>
+          <a:solidFill>
+            <a:srgbClr val="FFFFFF"/>
+          </a:solidFill>
+          <a:ln w="15875">
+            <a:solidFill>
+              <a:srgbClr val="D9DEE7"/>
+            </a:solidFill>
+            <a:prstDash val="solid"/>
+          </a:ln>
+        </p:spPr>
+      </p:sp>
+      <p:sp>
+        <p:nvSpPr>
+          <p:cNvPr id="12" name="Text 10"/>
+          <p:cNvSpPr txBox="1"/>
+          <p:nvPr/>
+        </p:nvSpPr>
+        <p:spPr>
+          <a:xfrm>
+            <a:off x="914400" y="3236976"/>
+            <a:ext cx="9418320" cy="877824"/>
+          </a:xfrm>
+          <a:prstGeom prst="rect">
+            <a:avLst/>
+          </a:prstGeom>
+          <a:noFill/>
+          <a:ln/>
+        </p:spPr>
+        <p:txBody>
+          <a:bodyPr wrap="square" lIns="0" tIns="0" rIns="0" bIns="0" rtlCol="0" anchor="ctr"/>
+          <a:lstStyle/>
+          <a:p>
+            <a:pPr indent="0" marL="0">
+              <a:lnSpc>
+                <a:spcPct val="118000"/>
+              </a:lnSpc>
+              <a:buNone/>
+            </a:pPr>
+            <a:r>
+              <a:rPr lang="en-US" sz="1700" dirty="0">
+                <a:solidFill>
+                  <a:srgbClr val="101828"/>
+                </a:solidFill>
+                <a:latin typeface="IBM Plex Sans" pitchFamily="34" charset="0"/>
+                <a:ea typeface="IBM Plex Sans" pitchFamily="34" charset="-122"/>
+                <a:cs typeface="IBM Plex Sans" pitchFamily="34" charset="-120"/>
+              </a:rPr>
+              <a:t>Explain the difference between a for loop and a while loop.</a:t>
+            </a:r>
+            <a:endParaRPr lang="en-US" sz="1700" dirty="0"/>
+          </a:p>
+        </p:txBody>
+      </p:sp>
+      <p:sp>
+        <p:nvSpPr>
+          <p:cNvPr id="13" name="Shape 11"/>
+          <p:cNvSpPr/>
+          <p:nvPr/>
+        </p:nvSpPr>
+        <p:spPr>
+          <a:xfrm>
+            <a:off x="10515600" y="3429000"/>
+            <a:ext cx="868680" cy="493776"/>
+          </a:xfrm>
+          <a:prstGeom prst="roundRect">
+            <a:avLst>
+              <a:gd name="adj" fmla="val 18519"/>
+            </a:avLst>
+          </a:prstGeom>
+          <a:solidFill>
+            <a:srgbClr val="EEF2FB"/>
+          </a:solidFill>
+          <a:ln/>
+        </p:spPr>
+      </p:sp>
+      <p:sp>
+        <p:nvSpPr>
+          <p:cNvPr id="14" name="Text 12"/>
+          <p:cNvSpPr txBox="1"/>
+          <p:nvPr/>
+        </p:nvSpPr>
+        <p:spPr>
+          <a:xfrm>
+            <a:off x="10515600" y="3429000"/>
+            <a:ext cx="868680" cy="493776"/>
+          </a:xfrm>
+          <a:prstGeom prst="rect">
+            <a:avLst/>
+          </a:prstGeom>
+          <a:noFill/>
+          <a:ln/>
+        </p:spPr>
+        <p:txBody>
+          <a:bodyPr wrap="square" lIns="0" tIns="0" rIns="0" bIns="0" rtlCol="0" anchor="ctr"/>
+          <a:lstStyle/>
+          <a:p>
+            <a:pPr algn="ctr" indent="0" marL="0">
+              <a:buNone/>
+            </a:pPr>
+            <a:r>
+              <a:rPr lang="en-US" sz="1500" b="1" dirty="0">
+                <a:solidFill>
+                  <a:srgbClr val="2D63FF"/>
+                </a:solidFill>
+                <a:latin typeface="IBM Plex Mono" pitchFamily="34" charset="0"/>
+                <a:ea typeface="IBM Plex Mono" pitchFamily="34" charset="-122"/>
+                <a:cs typeface="IBM Plex Mono" pitchFamily="34" charset="-120"/>
+              </a:rPr>
+              <a:t>[3]</a:t>
+            </a:r>
+            <a:endParaRPr lang="en-US" sz="1500" dirty="0"/>
+          </a:p>
+        </p:txBody>
+      </p:sp>
+      <p:sp>
+        <p:nvSpPr>
+          <p:cNvPr id="15" name="Shape 13"/>
+          <p:cNvSpPr/>
+          <p:nvPr/>
+        </p:nvSpPr>
+        <p:spPr>
+          <a:xfrm>
+            <a:off x="502920" y="4425696"/>
+            <a:ext cx="11155680" cy="1097280"/>
+          </a:xfrm>
+          <a:prstGeom prst="roundRect">
+            <a:avLst>
+              <a:gd name="adj" fmla="val 10000"/>
+            </a:avLst>
+          </a:prstGeom>
+          <a:solidFill>
+            <a:srgbClr val="FFFFFF"/>
+          </a:solidFill>
+          <a:ln w="15875">
+            <a:solidFill>
+              <a:srgbClr val="D9DEE7"/>
+            </a:solidFill>
+            <a:prstDash val="solid"/>
+          </a:ln>
+        </p:spPr>
+      </p:sp>
+      <p:sp>
+        <p:nvSpPr>
+          <p:cNvPr id="16" name="Text 14"/>
+          <p:cNvSpPr txBox="1"/>
+          <p:nvPr/>
+        </p:nvSpPr>
+        <p:spPr>
+          <a:xfrm>
+            <a:off x="914400" y="4535424"/>
+            <a:ext cx="9418320" cy="877824"/>
+          </a:xfrm>
+          <a:prstGeom prst="rect">
+            <a:avLst/>
+          </a:prstGeom>
+          <a:noFill/>
+          <a:ln/>
+        </p:spPr>
+        <p:txBody>
+          <a:bodyPr wrap="square" lIns="0" tIns="0" rIns="0" bIns="0" rtlCol="0" anchor="ctr"/>
+          <a:lstStyle/>
+          <a:p>
+            <a:pPr indent="0" marL="0">
+              <a:lnSpc>
+                <a:spcPct val="118000"/>
+              </a:lnSpc>
+              <a:buNone/>
+            </a:pPr>
+            <a:r>
+              <a:rPr lang="en-US" sz="1700" dirty="0">
+                <a:solidFill>
+                  <a:srgbClr val="101828"/>
+                </a:solidFill>
+                <a:latin typeface="IBM Plex Sans" pitchFamily="34" charset="0"/>
+                <a:ea typeface="IBM Plex Sans" pitchFamily="34" charset="-122"/>
+                <a:cs typeface="IBM Plex Sans" pitchFamily="34" charset="-120"/>
+              </a:rPr>
+              <a:t>Write an algorithm, using pseudocode, that inputs ten numbers and outputs the largest.</a:t>
+            </a:r>
+            <a:endParaRPr lang="en-US" sz="1700" dirty="0"/>
+          </a:p>
+        </p:txBody>
+      </p:sp>
+      <p:sp>
+        <p:nvSpPr>
+          <p:cNvPr id="17" name="Shape 15"/>
+          <p:cNvSpPr/>
+          <p:nvPr/>
+        </p:nvSpPr>
+        <p:spPr>
+          <a:xfrm>
+            <a:off x="10515600" y="4727448"/>
+            <a:ext cx="868680" cy="493776"/>
+          </a:xfrm>
+          <a:prstGeom prst="roundRect">
+            <a:avLst>
+              <a:gd name="adj" fmla="val 18519"/>
+            </a:avLst>
+          </a:prstGeom>
+          <a:solidFill>
+            <a:srgbClr val="EEF2FB"/>
+          </a:solidFill>
+          <a:ln/>
+        </p:spPr>
+      </p:sp>
+      <p:sp>
+        <p:nvSpPr>
+          <p:cNvPr id="18" name="Text 16"/>
+          <p:cNvSpPr txBox="1"/>
+          <p:nvPr/>
+        </p:nvSpPr>
+        <p:spPr>
+          <a:xfrm>
+            <a:off x="10515600" y="4727448"/>
+            <a:ext cx="868680" cy="493776"/>
+          </a:xfrm>
+          <a:prstGeom prst="rect">
+            <a:avLst/>
+          </a:prstGeom>
+          <a:noFill/>
+          <a:ln/>
+        </p:spPr>
+        <p:txBody>
+          <a:bodyPr wrap="square" lIns="0" tIns="0" rIns="0" bIns="0" rtlCol="0" anchor="ctr"/>
+          <a:lstStyle/>
+          <a:p>
+            <a:pPr algn="ctr" indent="0" marL="0">
+              <a:buNone/>
+            </a:pPr>
+            <a:r>
+              <a:rPr lang="en-US" sz="1500" b="1" dirty="0">
+                <a:solidFill>
+                  <a:srgbClr val="2D63FF"/>
+                </a:solidFill>
+                <a:latin typeface="IBM Plex Mono" pitchFamily="34" charset="0"/>
+                <a:ea typeface="IBM Plex Mono" pitchFamily="34" charset="-122"/>
+                <a:cs typeface="IBM Plex Mono" pitchFamily="34" charset="-120"/>
+              </a:rPr>
+              <a:t>[6]</a:t>
+            </a:r>
+            <a:endParaRPr lang="en-US" sz="1500" dirty="0"/>
+          </a:p>
+        </p:txBody>
+      </p:sp>
+    </p:spTree>
+  </p:cSld>
+  <p:clrMapOvr>
+    <a:masterClrMapping/>
+  </p:clrMapOvr>
+</p:sld>
+</file>
+
+<file path=ppt/slides/slide16.xml><?xml version="1.0" encoding="utf-8"?>
+<p:sld xmlns:a="http://schemas.openxmlformats.org/drawingml/2006/main" xmlns:r="http://schemas.openxmlformats.org/officeDocument/2006/relationships" xmlns:p="http://schemas.openxmlformats.org/presentationml/2006/main">
+  <p:cSld name="Slide 16">
     <p:bg>
       <p:bgPr>
         <a:solidFill>
